--- a/2026/2026-03-27-AI-Updates.pptx
+++ b/2026/2026-03-27-AI-Updates.pptx
@@ -5,7 +5,7 @@
     <p:sldMasterId id="2147483661" r:id="rId1"/>
   </p:sldMasterIdLst>
   <p:notesMasterIdLst>
-    <p:notesMasterId r:id="rId30"/>
+    <p:notesMasterId r:id="rId31"/>
   </p:notesMasterIdLst>
   <p:sldIdLst>
     <p:sldId id="256" r:id="rId2"/>
@@ -36,16 +36,17 @@
     <p:sldId id="281" r:id="rId27"/>
     <p:sldId id="282" r:id="rId28"/>
     <p:sldId id="283" r:id="rId29"/>
+    <p:sldId id="284" r:id="rId30"/>
   </p:sldIdLst>
   <p:sldSz cx="9144000" cy="5143500" type="screen16x9"/>
   <p:notesSz cx="6858000" cy="9144000"/>
   <p:embeddedFontLst>
     <p:embeddedFont>
       <p:font typeface="Roboto Mono" pitchFamily="49" charset="0"/>
-      <p:regular r:id="rId31"/>
-      <p:bold r:id="rId32"/>
-      <p:italic r:id="rId33"/>
-      <p:boldItalic r:id="rId34"/>
+      <p:regular r:id="rId32"/>
+      <p:bold r:id="rId33"/>
+      <p:italic r:id="rId34"/>
+      <p:boldItalic r:id="rId35"/>
     </p:embeddedFont>
   </p:embeddedFontLst>
   <p:defaultTextStyle>
@@ -986,7 +987,7 @@
   <p:cSld>
     <p:spTree>
       <p:nvGrpSpPr>
-        <p:cNvPr id="1" name="Shape 138"/>
+        <p:cNvPr id="1" name="Shape 142"/>
         <p:cNvGrpSpPr/>
         <p:nvPr/>
       </p:nvGrpSpPr>
@@ -1000,7 +1001,7 @@
       </p:grpSpPr>
       <p:sp>
         <p:nvSpPr>
-          <p:cNvPr id="139" name="Google Shape;139;g3d27381d120_2_0:notes"/>
+          <p:cNvPr id="143" name="Google Shape;143;g3d27381d120_2_0:notes"/>
           <p:cNvSpPr>
             <a:spLocks noGrp="1" noRot="1" noChangeAspect="1"/>
           </p:cNvSpPr>
@@ -1051,7 +1052,7 @@
       </p:sp>
       <p:sp>
         <p:nvSpPr>
-          <p:cNvPr id="140" name="Google Shape;140;g3d27381d120_2_0:notes"/>
+          <p:cNvPr id="144" name="Google Shape;144;g3d27381d120_2_0:notes"/>
           <p:cNvSpPr txBox="1">
             <a:spLocks noGrp="1"/>
           </p:cNvSpPr>
@@ -1108,7 +1109,7 @@
   <p:cSld>
     <p:spTree>
       <p:nvGrpSpPr>
-        <p:cNvPr id="1" name="Shape 149"/>
+        <p:cNvPr id="1" name="Shape 153"/>
         <p:cNvGrpSpPr/>
         <p:nvPr/>
       </p:nvGrpSpPr>
@@ -1122,7 +1123,7 @@
       </p:grpSpPr>
       <p:sp>
         <p:nvSpPr>
-          <p:cNvPr id="150" name="Google Shape;150;g3d27381d120_1_0:notes"/>
+          <p:cNvPr id="154" name="Google Shape;154;g3d27381d120_1_0:notes"/>
           <p:cNvSpPr>
             <a:spLocks noGrp="1" noRot="1" noChangeAspect="1"/>
           </p:cNvSpPr>
@@ -1173,7 +1174,7 @@
       </p:sp>
       <p:sp>
         <p:nvSpPr>
-          <p:cNvPr id="151" name="Google Shape;151;g3d27381d120_1_0:notes"/>
+          <p:cNvPr id="155" name="Google Shape;155;g3d27381d120_1_0:notes"/>
           <p:cNvSpPr txBox="1">
             <a:spLocks noGrp="1"/>
           </p:cNvSpPr>
@@ -1230,7 +1231,7 @@
   <p:cSld>
     <p:spTree>
       <p:nvGrpSpPr>
-        <p:cNvPr id="1" name="Shape 158"/>
+        <p:cNvPr id="1" name="Shape 162"/>
         <p:cNvGrpSpPr/>
         <p:nvPr/>
       </p:nvGrpSpPr>
@@ -1244,7 +1245,7 @@
       </p:grpSpPr>
       <p:sp>
         <p:nvSpPr>
-          <p:cNvPr id="159" name="Google Shape;159;g3965794991b_0_17:notes"/>
+          <p:cNvPr id="163" name="Google Shape;163;g3965794991b_0_17:notes"/>
           <p:cNvSpPr>
             <a:spLocks noGrp="1" noRot="1" noChangeAspect="1"/>
           </p:cNvSpPr>
@@ -1295,7 +1296,7 @@
       </p:sp>
       <p:sp>
         <p:nvSpPr>
-          <p:cNvPr id="160" name="Google Shape;160;g3965794991b_0_17:notes"/>
+          <p:cNvPr id="164" name="Google Shape;164;g3965794991b_0_17:notes"/>
           <p:cNvSpPr txBox="1">
             <a:spLocks noGrp="1"/>
           </p:cNvSpPr>
@@ -1352,7 +1353,7 @@
   <p:cSld>
     <p:spTree>
       <p:nvGrpSpPr>
-        <p:cNvPr id="1" name="Shape 169"/>
+        <p:cNvPr id="1" name="Shape 173"/>
         <p:cNvGrpSpPr/>
         <p:nvPr/>
       </p:nvGrpSpPr>
@@ -1366,7 +1367,7 @@
       </p:grpSpPr>
       <p:sp>
         <p:nvSpPr>
-          <p:cNvPr id="170" name="Google Shape;170;g3965f323ae1_0_0:notes"/>
+          <p:cNvPr id="174" name="Google Shape;174;g3965f323ae1_0_0:notes"/>
           <p:cNvSpPr>
             <a:spLocks noGrp="1" noRot="1" noChangeAspect="1"/>
           </p:cNvSpPr>
@@ -1417,7 +1418,7 @@
       </p:sp>
       <p:sp>
         <p:nvSpPr>
-          <p:cNvPr id="171" name="Google Shape;171;g3965f323ae1_0_0:notes"/>
+          <p:cNvPr id="175" name="Google Shape;175;g3965f323ae1_0_0:notes"/>
           <p:cNvSpPr txBox="1">
             <a:spLocks noGrp="1"/>
           </p:cNvSpPr>
@@ -1474,7 +1475,7 @@
   <p:cSld>
     <p:spTree>
       <p:nvGrpSpPr>
-        <p:cNvPr id="1" name="Shape 176"/>
+        <p:cNvPr id="1" name="Shape 180"/>
         <p:cNvGrpSpPr/>
         <p:nvPr/>
       </p:nvGrpSpPr>
@@ -1488,7 +1489,7 @@
       </p:grpSpPr>
       <p:sp>
         <p:nvSpPr>
-          <p:cNvPr id="177" name="Google Shape;177;g3965794991b_0_0:notes"/>
+          <p:cNvPr id="181" name="Google Shape;181;g3965794991b_0_0:notes"/>
           <p:cNvSpPr>
             <a:spLocks noGrp="1" noRot="1" noChangeAspect="1"/>
           </p:cNvSpPr>
@@ -1539,7 +1540,7 @@
       </p:sp>
       <p:sp>
         <p:nvSpPr>
-          <p:cNvPr id="178" name="Google Shape;178;g3965794991b_0_0:notes"/>
+          <p:cNvPr id="182" name="Google Shape;182;g3965794991b_0_0:notes"/>
           <p:cNvSpPr txBox="1">
             <a:spLocks noGrp="1"/>
           </p:cNvSpPr>
@@ -1596,7 +1597,7 @@
   <p:cSld>
     <p:spTree>
       <p:nvGrpSpPr>
-        <p:cNvPr id="1" name="Shape 184"/>
+        <p:cNvPr id="1" name="Shape 188"/>
         <p:cNvGrpSpPr/>
         <p:nvPr/>
       </p:nvGrpSpPr>
@@ -1610,7 +1611,7 @@
       </p:grpSpPr>
       <p:sp>
         <p:nvSpPr>
-          <p:cNvPr id="185" name="Google Shape;185;g3d141879f26_0_0:notes"/>
+          <p:cNvPr id="189" name="Google Shape;189;g3d141879f26_0_0:notes"/>
           <p:cNvSpPr>
             <a:spLocks noGrp="1" noRot="1" noChangeAspect="1"/>
           </p:cNvSpPr>
@@ -1661,7 +1662,7 @@
       </p:sp>
       <p:sp>
         <p:nvSpPr>
-          <p:cNvPr id="186" name="Google Shape;186;g3d141879f26_0_0:notes"/>
+          <p:cNvPr id="190" name="Google Shape;190;g3d141879f26_0_0:notes"/>
           <p:cNvSpPr txBox="1">
             <a:spLocks noGrp="1"/>
           </p:cNvSpPr>
@@ -1718,7 +1719,7 @@
   <p:cSld>
     <p:spTree>
       <p:nvGrpSpPr>
-        <p:cNvPr id="1" name="Shape 191"/>
+        <p:cNvPr id="1" name="Shape 195"/>
         <p:cNvGrpSpPr/>
         <p:nvPr/>
       </p:nvGrpSpPr>
@@ -1732,7 +1733,7 @@
       </p:grpSpPr>
       <p:sp>
         <p:nvSpPr>
-          <p:cNvPr id="192" name="Google Shape;192;g39646540ac2_0_0:notes"/>
+          <p:cNvPr id="196" name="Google Shape;196;g39646540ac2_0_0:notes"/>
           <p:cNvSpPr>
             <a:spLocks noGrp="1" noRot="1" noChangeAspect="1"/>
           </p:cNvSpPr>
@@ -1783,7 +1784,7 @@
       </p:sp>
       <p:sp>
         <p:nvSpPr>
-          <p:cNvPr id="193" name="Google Shape;193;g39646540ac2_0_0:notes"/>
+          <p:cNvPr id="197" name="Google Shape;197;g39646540ac2_0_0:notes"/>
           <p:cNvSpPr txBox="1">
             <a:spLocks noGrp="1"/>
           </p:cNvSpPr>
@@ -1840,7 +1841,7 @@
   <p:cSld>
     <p:spTree>
       <p:nvGrpSpPr>
-        <p:cNvPr id="1" name="Shape 199"/>
+        <p:cNvPr id="1" name="Shape 203"/>
         <p:cNvGrpSpPr/>
         <p:nvPr/>
       </p:nvGrpSpPr>
@@ -1854,7 +1855,7 @@
       </p:grpSpPr>
       <p:sp>
         <p:nvSpPr>
-          <p:cNvPr id="200" name="Google Shape;200;g3964f5a9299_0_0:notes"/>
+          <p:cNvPr id="204" name="Google Shape;204;g3964f5a9299_0_0:notes"/>
           <p:cNvSpPr>
             <a:spLocks noGrp="1" noRot="1" noChangeAspect="1"/>
           </p:cNvSpPr>
@@ -1905,7 +1906,7 @@
       </p:sp>
       <p:sp>
         <p:nvSpPr>
-          <p:cNvPr id="201" name="Google Shape;201;g3964f5a9299_0_0:notes"/>
+          <p:cNvPr id="205" name="Google Shape;205;g3964f5a9299_0_0:notes"/>
           <p:cNvSpPr txBox="1">
             <a:spLocks noGrp="1"/>
           </p:cNvSpPr>
@@ -1962,7 +1963,7 @@
   <p:cSld>
     <p:spTree>
       <p:nvGrpSpPr>
-        <p:cNvPr id="1" name="Shape 207"/>
+        <p:cNvPr id="1" name="Shape 211"/>
         <p:cNvGrpSpPr/>
         <p:nvPr/>
       </p:nvGrpSpPr>
@@ -1976,7 +1977,7 @@
       </p:grpSpPr>
       <p:sp>
         <p:nvSpPr>
-          <p:cNvPr id="208" name="Google Shape;208;g3966fa18b95_0_0:notes"/>
+          <p:cNvPr id="212" name="Google Shape;212;g3966fa18b95_0_0:notes"/>
           <p:cNvSpPr>
             <a:spLocks noGrp="1" noRot="1" noChangeAspect="1"/>
           </p:cNvSpPr>
@@ -2027,7 +2028,7 @@
       </p:sp>
       <p:sp>
         <p:nvSpPr>
-          <p:cNvPr id="209" name="Google Shape;209;g3966fa18b95_0_0:notes"/>
+          <p:cNvPr id="213" name="Google Shape;213;g3966fa18b95_0_0:notes"/>
           <p:cNvSpPr txBox="1">
             <a:spLocks noGrp="1"/>
           </p:cNvSpPr>
@@ -2084,7 +2085,7 @@
   <p:cSld>
     <p:spTree>
       <p:nvGrpSpPr>
-        <p:cNvPr id="1" name="Shape 214"/>
+        <p:cNvPr id="1" name="Shape 220"/>
         <p:cNvGrpSpPr/>
         <p:nvPr/>
       </p:nvGrpSpPr>
@@ -2098,7 +2099,7 @@
       </p:grpSpPr>
       <p:sp>
         <p:nvSpPr>
-          <p:cNvPr id="215" name="Google Shape;215;g3d23f4a0950_0_0:notes"/>
+          <p:cNvPr id="221" name="Google Shape;221;g3d23f4a0950_0_0:notes"/>
           <p:cNvSpPr>
             <a:spLocks noGrp="1" noRot="1" noChangeAspect="1"/>
           </p:cNvSpPr>
@@ -2149,7 +2150,7 @@
       </p:sp>
       <p:sp>
         <p:nvSpPr>
-          <p:cNvPr id="216" name="Google Shape;216;g3d23f4a0950_0_0:notes"/>
+          <p:cNvPr id="222" name="Google Shape;222;g3d23f4a0950_0_0:notes"/>
           <p:cNvSpPr txBox="1">
             <a:spLocks noGrp="1"/>
           </p:cNvSpPr>
@@ -2328,7 +2329,7 @@
   <p:cSld>
     <p:spTree>
       <p:nvGrpSpPr>
-        <p:cNvPr id="1" name="Shape 225"/>
+        <p:cNvPr id="1" name="Shape 231"/>
         <p:cNvGrpSpPr/>
         <p:nvPr/>
       </p:nvGrpSpPr>
@@ -2342,7 +2343,7 @@
       </p:grpSpPr>
       <p:sp>
         <p:nvSpPr>
-          <p:cNvPr id="226" name="Google Shape;226;g3967362f0ee_0_1:notes"/>
+          <p:cNvPr id="232" name="Google Shape;232;g3967362f0ee_0_1:notes"/>
           <p:cNvSpPr>
             <a:spLocks noGrp="1" noRot="1" noChangeAspect="1"/>
           </p:cNvSpPr>
@@ -2393,7 +2394,7 @@
       </p:sp>
       <p:sp>
         <p:nvSpPr>
-          <p:cNvPr id="227" name="Google Shape;227;g3967362f0ee_0_1:notes"/>
+          <p:cNvPr id="233" name="Google Shape;233;g3967362f0ee_0_1:notes"/>
           <p:cNvSpPr txBox="1">
             <a:spLocks noGrp="1"/>
           </p:cNvSpPr>
@@ -2450,7 +2451,7 @@
   <p:cSld>
     <p:spTree>
       <p:nvGrpSpPr>
-        <p:cNvPr id="1" name="Shape 236"/>
+        <p:cNvPr id="1" name="Shape 242"/>
         <p:cNvGrpSpPr/>
         <p:nvPr/>
       </p:nvGrpSpPr>
@@ -2464,7 +2465,7 @@
       </p:grpSpPr>
       <p:sp>
         <p:nvSpPr>
-          <p:cNvPr id="237" name="Google Shape;237;g3d27381d120_3_0:notes"/>
+          <p:cNvPr id="243" name="Google Shape;243;g3d27381d120_3_0:notes"/>
           <p:cNvSpPr>
             <a:spLocks noGrp="1" noRot="1" noChangeAspect="1"/>
           </p:cNvSpPr>
@@ -2515,7 +2516,7 @@
       </p:sp>
       <p:sp>
         <p:nvSpPr>
-          <p:cNvPr id="238" name="Google Shape;238;g3d27381d120_3_0:notes"/>
+          <p:cNvPr id="244" name="Google Shape;244;g3d27381d120_3_0:notes"/>
           <p:cNvSpPr txBox="1">
             <a:spLocks noGrp="1"/>
           </p:cNvSpPr>
@@ -2572,7 +2573,7 @@
   <p:cSld>
     <p:spTree>
       <p:nvGrpSpPr>
-        <p:cNvPr id="1" name="Shape 245"/>
+        <p:cNvPr id="1" name="Shape 251"/>
         <p:cNvGrpSpPr/>
         <p:nvPr/>
       </p:nvGrpSpPr>
@@ -2586,7 +2587,7 @@
       </p:grpSpPr>
       <p:sp>
         <p:nvSpPr>
-          <p:cNvPr id="246" name="Google Shape;246;g3d278522803_1_8:notes"/>
+          <p:cNvPr id="252" name="Google Shape;252;g3d278522803_1_8:notes"/>
           <p:cNvSpPr>
             <a:spLocks noGrp="1" noRot="1" noChangeAspect="1"/>
           </p:cNvSpPr>
@@ -2637,7 +2638,7 @@
       </p:sp>
       <p:sp>
         <p:nvSpPr>
-          <p:cNvPr id="247" name="Google Shape;247;g3d278522803_1_8:notes"/>
+          <p:cNvPr id="253" name="Google Shape;253;g3d278522803_1_8:notes"/>
           <p:cNvSpPr txBox="1">
             <a:spLocks noGrp="1"/>
           </p:cNvSpPr>
@@ -2694,7 +2695,7 @@
   <p:cSld>
     <p:spTree>
       <p:nvGrpSpPr>
-        <p:cNvPr id="1" name="Shape 254"/>
+        <p:cNvPr id="1" name="Shape 260"/>
         <p:cNvGrpSpPr/>
         <p:nvPr/>
       </p:nvGrpSpPr>
@@ -2708,7 +2709,7 @@
       </p:grpSpPr>
       <p:sp>
         <p:nvSpPr>
-          <p:cNvPr id="255" name="Google Shape;255;g3d278522803_1_1:notes"/>
+          <p:cNvPr id="261" name="Google Shape;261;g3d278522803_1_1:notes"/>
           <p:cNvSpPr>
             <a:spLocks noGrp="1" noRot="1" noChangeAspect="1"/>
           </p:cNvSpPr>
@@ -2759,7 +2760,7 @@
       </p:sp>
       <p:sp>
         <p:nvSpPr>
-          <p:cNvPr id="256" name="Google Shape;256;g3d278522803_1_1:notes"/>
+          <p:cNvPr id="262" name="Google Shape;262;g3d278522803_1_1:notes"/>
           <p:cNvSpPr txBox="1">
             <a:spLocks noGrp="1"/>
           </p:cNvSpPr>
@@ -2816,7 +2817,7 @@
   <p:cSld>
     <p:spTree>
       <p:nvGrpSpPr>
-        <p:cNvPr id="1" name="Shape 261"/>
+        <p:cNvPr id="1" name="Shape 267"/>
         <p:cNvGrpSpPr/>
         <p:nvPr/>
       </p:nvGrpSpPr>
@@ -2830,7 +2831,7 @@
       </p:grpSpPr>
       <p:sp>
         <p:nvSpPr>
-          <p:cNvPr id="262" name="Google Shape;262;g396407788a8_0_0:notes"/>
+          <p:cNvPr id="268" name="Google Shape;268;g396407788a8_0_0:notes"/>
           <p:cNvSpPr>
             <a:spLocks noGrp="1" noRot="1" noChangeAspect="1"/>
           </p:cNvSpPr>
@@ -2881,7 +2882,7 @@
       </p:sp>
       <p:sp>
         <p:nvSpPr>
-          <p:cNvPr id="263" name="Google Shape;263;g396407788a8_0_0:notes"/>
+          <p:cNvPr id="269" name="Google Shape;269;g396407788a8_0_0:notes"/>
           <p:cNvSpPr txBox="1">
             <a:spLocks noGrp="1"/>
           </p:cNvSpPr>
@@ -2938,7 +2939,7 @@
   <p:cSld>
     <p:spTree>
       <p:nvGrpSpPr>
-        <p:cNvPr id="1" name="Shape 268"/>
+        <p:cNvPr id="1" name="Shape 274"/>
         <p:cNvGrpSpPr/>
         <p:nvPr/>
       </p:nvGrpSpPr>
@@ -2952,7 +2953,7 @@
       </p:grpSpPr>
       <p:sp>
         <p:nvSpPr>
-          <p:cNvPr id="269" name="Google Shape;269;p23:notes"/>
+          <p:cNvPr id="275" name="Google Shape;275;g3969226e930_3_0:notes"/>
           <p:cNvSpPr>
             <a:spLocks noGrp="1" noRot="1" noChangeAspect="1"/>
           </p:cNvSpPr>
@@ -3003,7 +3004,7 @@
       </p:sp>
       <p:sp>
         <p:nvSpPr>
-          <p:cNvPr id="270" name="Google Shape;270;p23:notes"/>
+          <p:cNvPr id="276" name="Google Shape;276;g3969226e930_3_0:notes"/>
           <p:cNvSpPr txBox="1">
             <a:spLocks noGrp="1"/>
           </p:cNvSpPr>
@@ -3060,7 +3061,7 @@
   <p:cSld>
     <p:spTree>
       <p:nvGrpSpPr>
-        <p:cNvPr id="1" name="Shape 278"/>
+        <p:cNvPr id="1" name="Shape 281"/>
         <p:cNvGrpSpPr/>
         <p:nvPr/>
       </p:nvGrpSpPr>
@@ -3074,7 +3075,7 @@
       </p:grpSpPr>
       <p:sp>
         <p:nvSpPr>
-          <p:cNvPr id="279" name="Google Shape;279;g3969226e930_1_0:notes"/>
+          <p:cNvPr id="282" name="Google Shape;282;p23:notes"/>
           <p:cNvSpPr>
             <a:spLocks noGrp="1" noRot="1" noChangeAspect="1"/>
           </p:cNvSpPr>
@@ -3125,7 +3126,7 @@
       </p:sp>
       <p:sp>
         <p:nvSpPr>
-          <p:cNvPr id="280" name="Google Shape;280;g3969226e930_1_0:notes"/>
+          <p:cNvPr id="283" name="Google Shape;283;p23:notes"/>
           <p:cNvSpPr txBox="1">
             <a:spLocks noGrp="1"/>
           </p:cNvSpPr>
@@ -3182,7 +3183,7 @@
   <p:cSld>
     <p:spTree>
       <p:nvGrpSpPr>
-        <p:cNvPr id="1" name="Shape 288"/>
+        <p:cNvPr id="1" name="Shape 291"/>
         <p:cNvGrpSpPr/>
         <p:nvPr/>
       </p:nvGrpSpPr>
@@ -3196,7 +3197,7 @@
       </p:grpSpPr>
       <p:sp>
         <p:nvSpPr>
-          <p:cNvPr id="289" name="Google Shape;289;p24:notes"/>
+          <p:cNvPr id="292" name="Google Shape;292;g3969226e930_1_0:notes"/>
           <p:cNvSpPr>
             <a:spLocks noGrp="1" noRot="1" noChangeAspect="1"/>
           </p:cNvSpPr>
@@ -3247,7 +3248,7 @@
       </p:sp>
       <p:sp>
         <p:nvSpPr>
-          <p:cNvPr id="290" name="Google Shape;290;p24:notes"/>
+          <p:cNvPr id="293" name="Google Shape;293;g3969226e930_1_0:notes"/>
           <p:cNvSpPr txBox="1">
             <a:spLocks noGrp="1"/>
           </p:cNvSpPr>
@@ -3304,7 +3305,7 @@
   <p:cSld>
     <p:spTree>
       <p:nvGrpSpPr>
-        <p:cNvPr id="1" name="Shape 298"/>
+        <p:cNvPr id="1" name="Shape 301"/>
         <p:cNvGrpSpPr/>
         <p:nvPr/>
       </p:nvGrpSpPr>
@@ -3318,7 +3319,129 @@
       </p:grpSpPr>
       <p:sp>
         <p:nvSpPr>
-          <p:cNvPr id="299" name="Google Shape;299;p25:notes"/>
+          <p:cNvPr id="302" name="Google Shape;302;p24:notes"/>
+          <p:cNvSpPr>
+            <a:spLocks noGrp="1" noRot="1" noChangeAspect="1"/>
+          </p:cNvSpPr>
+          <p:nvPr>
+            <p:ph type="sldImg" idx="2"/>
+          </p:nvPr>
+        </p:nvSpPr>
+        <p:spPr>
+          <a:xfrm>
+            <a:off x="381000" y="685800"/>
+            <a:ext cx="6096000" cy="3429000"/>
+          </a:xfrm>
+          <a:custGeom>
+            <a:avLst/>
+            <a:gdLst/>
+            <a:ahLst/>
+            <a:cxnLst/>
+            <a:rect l="l" t="t" r="r" b="b"/>
+            <a:pathLst>
+              <a:path w="120000" h="120000" extrusionOk="0">
+                <a:moveTo>
+                  <a:pt x="0" y="0"/>
+                </a:moveTo>
+                <a:lnTo>
+                  <a:pt x="120000" y="0"/>
+                </a:lnTo>
+                <a:lnTo>
+                  <a:pt x="120000" y="120000"/>
+                </a:lnTo>
+                <a:lnTo>
+                  <a:pt x="0" y="120000"/>
+                </a:lnTo>
+                <a:close/>
+              </a:path>
+            </a:pathLst>
+          </a:custGeom>
+          <a:noFill/>
+          <a:ln w="9525" cap="flat" cmpd="sng">
+            <a:solidFill>
+              <a:srgbClr val="000000"/>
+            </a:solidFill>
+            <a:prstDash val="solid"/>
+            <a:round/>
+            <a:headEnd type="none" w="sm" len="sm"/>
+            <a:tailEnd type="none" w="sm" len="sm"/>
+          </a:ln>
+        </p:spPr>
+      </p:sp>
+      <p:sp>
+        <p:nvSpPr>
+          <p:cNvPr id="303" name="Google Shape;303;p24:notes"/>
+          <p:cNvSpPr txBox="1">
+            <a:spLocks noGrp="1"/>
+          </p:cNvSpPr>
+          <p:nvPr>
+            <p:ph type="body" idx="1"/>
+          </p:nvPr>
+        </p:nvSpPr>
+        <p:spPr>
+          <a:xfrm>
+            <a:off x="685800" y="4343400"/>
+            <a:ext cx="5486400" cy="4114800"/>
+          </a:xfrm>
+          <a:prstGeom prst="rect">
+            <a:avLst/>
+          </a:prstGeom>
+          <a:noFill/>
+          <a:ln>
+            <a:noFill/>
+          </a:ln>
+        </p:spPr>
+        <p:txBody>
+          <a:bodyPr spcFirstLastPara="1" wrap="square" lIns="91425" tIns="91425" rIns="91425" bIns="91425" anchor="t" anchorCtr="0">
+            <a:noAutofit/>
+          </a:bodyPr>
+          <a:lstStyle/>
+          <a:p>
+            <a:pPr marL="0" lvl="0" indent="0" algn="l" rtl="0">
+              <a:lnSpc>
+                <a:spcPct val="100000"/>
+              </a:lnSpc>
+              <a:spcBef>
+                <a:spcPts val="0"/>
+              </a:spcBef>
+              <a:spcAft>
+                <a:spcPts val="0"/>
+              </a:spcAft>
+              <a:buSzPts val="1100"/>
+              <a:buNone/>
+            </a:pPr>
+            <a:endParaRPr/>
+          </a:p>
+        </p:txBody>
+      </p:sp>
+    </p:spTree>
+  </p:cSld>
+  <p:clrMapOvr>
+    <a:masterClrMapping/>
+  </p:clrMapOvr>
+</p:notes>
+</file>
+
+<file path=ppt/notesSlides/notesSlide29.xml><?xml version="1.0" encoding="utf-8"?>
+<p:notes xmlns:a="http://schemas.openxmlformats.org/drawingml/2006/main" xmlns:r="http://schemas.openxmlformats.org/officeDocument/2006/relationships" xmlns:p="http://schemas.openxmlformats.org/presentationml/2006/main" showMasterSp="0" showMasterPhAnim="0">
+  <p:cSld>
+    <p:spTree>
+      <p:nvGrpSpPr>
+        <p:cNvPr id="1" name="Shape 311"/>
+        <p:cNvGrpSpPr/>
+        <p:nvPr/>
+      </p:nvGrpSpPr>
+      <p:grpSpPr>
+        <a:xfrm>
+          <a:off x="0" y="0"/>
+          <a:ext cx="0" cy="0"/>
+          <a:chOff x="0" y="0"/>
+          <a:chExt cx="0" cy="0"/>
+        </a:xfrm>
+      </p:grpSpPr>
+      <p:sp>
+        <p:nvSpPr>
+          <p:cNvPr id="312" name="Google Shape;312;p25:notes"/>
           <p:cNvSpPr>
             <a:spLocks noGrp="1" noRot="1" noChangeAspect="1"/>
           </p:cNvSpPr>
@@ -3369,7 +3492,7 @@
       </p:sp>
       <p:sp>
         <p:nvSpPr>
-          <p:cNvPr id="300" name="Google Shape;300;p25:notes"/>
+          <p:cNvPr id="313" name="Google Shape;313;p25:notes"/>
           <p:cNvSpPr txBox="1">
             <a:spLocks noGrp="1"/>
           </p:cNvSpPr>
@@ -3792,7 +3915,7 @@
   <p:cSld>
     <p:spTree>
       <p:nvGrpSpPr>
-        <p:cNvPr id="1" name="Shape 108"/>
+        <p:cNvPr id="1" name="Shape 109"/>
         <p:cNvGrpSpPr/>
         <p:nvPr/>
       </p:nvGrpSpPr>
@@ -3806,7 +3929,7 @@
       </p:grpSpPr>
       <p:sp>
         <p:nvSpPr>
-          <p:cNvPr id="109" name="Google Shape;109;g3967e5cca06_1_0:notes"/>
+          <p:cNvPr id="110" name="Google Shape;110;g3967e5cca06_1_0:notes"/>
           <p:cNvSpPr>
             <a:spLocks noGrp="1" noRot="1" noChangeAspect="1"/>
           </p:cNvSpPr>
@@ -3857,7 +3980,7 @@
       </p:sp>
       <p:sp>
         <p:nvSpPr>
-          <p:cNvPr id="110" name="Google Shape;110;g3967e5cca06_1_0:notes"/>
+          <p:cNvPr id="111" name="Google Shape;111;g3967e5cca06_1_0:notes"/>
           <p:cNvSpPr txBox="1">
             <a:spLocks noGrp="1"/>
           </p:cNvSpPr>
@@ -3914,7 +4037,7 @@
   <p:cSld>
     <p:spTree>
       <p:nvGrpSpPr>
-        <p:cNvPr id="1" name="Shape 117"/>
+        <p:cNvPr id="1" name="Shape 118"/>
         <p:cNvGrpSpPr/>
         <p:nvPr/>
       </p:nvGrpSpPr>
@@ -3928,7 +4051,7 @@
       </p:grpSpPr>
       <p:sp>
         <p:nvSpPr>
-          <p:cNvPr id="118" name="Google Shape;118;g39318675434_2_0:notes"/>
+          <p:cNvPr id="119" name="Google Shape;119;g39318675434_2_0:notes"/>
           <p:cNvSpPr>
             <a:spLocks noGrp="1" noRot="1" noChangeAspect="1"/>
           </p:cNvSpPr>
@@ -3979,7 +4102,7 @@
       </p:sp>
       <p:sp>
         <p:nvSpPr>
-          <p:cNvPr id="119" name="Google Shape;119;g39318675434_2_0:notes"/>
+          <p:cNvPr id="120" name="Google Shape;120;g39318675434_2_0:notes"/>
           <p:cNvSpPr txBox="1">
             <a:spLocks noGrp="1"/>
           </p:cNvSpPr>
@@ -4036,7 +4159,7 @@
   <p:cSld>
     <p:spTree>
       <p:nvGrpSpPr>
-        <p:cNvPr id="1" name="Shape 123"/>
+        <p:cNvPr id="1" name="Shape 124"/>
         <p:cNvGrpSpPr/>
         <p:nvPr/>
       </p:nvGrpSpPr>
@@ -4050,7 +4173,7 @@
       </p:grpSpPr>
       <p:sp>
         <p:nvSpPr>
-          <p:cNvPr id="124" name="Google Shape;124;g396870ff393_0_0:notes"/>
+          <p:cNvPr id="125" name="Google Shape;125;g396870ff393_0_0:notes"/>
           <p:cNvSpPr>
             <a:spLocks noGrp="1" noRot="1" noChangeAspect="1"/>
           </p:cNvSpPr>
@@ -4101,7 +4224,7 @@
       </p:sp>
       <p:sp>
         <p:nvSpPr>
-          <p:cNvPr id="125" name="Google Shape;125;g396870ff393_0_0:notes"/>
+          <p:cNvPr id="126" name="Google Shape;126;g396870ff393_0_0:notes"/>
           <p:cNvSpPr txBox="1">
             <a:spLocks noGrp="1"/>
           </p:cNvSpPr>
@@ -4158,7 +4281,7 @@
   <p:cSld>
     <p:spTree>
       <p:nvGrpSpPr>
-        <p:cNvPr id="1" name="Shape 130"/>
+        <p:cNvPr id="1" name="Shape 133"/>
         <p:cNvGrpSpPr/>
         <p:nvPr/>
       </p:nvGrpSpPr>
@@ -4172,7 +4295,7 @@
       </p:grpSpPr>
       <p:sp>
         <p:nvSpPr>
-          <p:cNvPr id="131" name="Google Shape;131;g3969226e930_1_16:notes"/>
+          <p:cNvPr id="134" name="Google Shape;134;g3969226e930_1_16:notes"/>
           <p:cNvSpPr>
             <a:spLocks noGrp="1" noRot="1" noChangeAspect="1"/>
           </p:cNvSpPr>
@@ -4223,7 +4346,7 @@
       </p:sp>
       <p:sp>
         <p:nvSpPr>
-          <p:cNvPr id="132" name="Google Shape;132;g3969226e930_1_16:notes"/>
+          <p:cNvPr id="135" name="Google Shape;135;g3969226e930_1_16:notes"/>
           <p:cNvSpPr txBox="1">
             <a:spLocks noGrp="1"/>
           </p:cNvSpPr>
@@ -13672,7 +13795,7 @@
         </p:nvSpPr>
         <p:spPr>
           <a:xfrm>
-            <a:off x="78651" y="547701"/>
+            <a:off x="78651" y="459020"/>
             <a:ext cx="4420200" cy="1742400"/>
           </a:xfrm>
           <a:prstGeom prst="rect">
@@ -14092,7 +14215,7 @@
         </p:nvSpPr>
         <p:spPr>
           <a:xfrm>
-            <a:off x="4574323" y="4750490"/>
+            <a:off x="4574323" y="4839171"/>
             <a:ext cx="4502400" cy="234000"/>
           </a:xfrm>
           <a:prstGeom prst="rect">
@@ -14178,8 +14301,8 @@
         </p:nvSpPr>
         <p:spPr>
           <a:xfrm>
-            <a:off x="78651" y="2380212"/>
-            <a:ext cx="4420200" cy="2604300"/>
+            <a:off x="78651" y="2261971"/>
+            <a:ext cx="4420200" cy="2819700"/>
           </a:xfrm>
           <a:prstGeom prst="rect">
             <a:avLst/>
@@ -14310,6 +14433,46 @@
                 <a:cs typeface="Calibri"/>
                 <a:sym typeface="Calibri"/>
               </a:rPr>
+              <a:t>Google Gemini 3.1 Ultra - 2M window, multimodal</a:t>
+            </a:r>
+            <a:endParaRPr b="1">
+              <a:solidFill>
+                <a:srgbClr val="3C78D8"/>
+              </a:solidFill>
+              <a:latin typeface="Calibri"/>
+              <a:ea typeface="Calibri"/>
+              <a:cs typeface="Calibri"/>
+              <a:sym typeface="Calibri"/>
+            </a:endParaRPr>
+          </a:p>
+          <a:p>
+            <a:pPr marL="228600" marR="0" lvl="0" indent="-203200" algn="l" rtl="0">
+              <a:lnSpc>
+                <a:spcPct val="100000"/>
+              </a:lnSpc>
+              <a:spcBef>
+                <a:spcPts val="0"/>
+              </a:spcBef>
+              <a:spcAft>
+                <a:spcPts val="0"/>
+              </a:spcAft>
+              <a:buClr>
+                <a:srgbClr val="3C78D8"/>
+              </a:buClr>
+              <a:buSzPts val="1400"/>
+              <a:buFont typeface="Calibri"/>
+              <a:buChar char="●"/>
+            </a:pPr>
+            <a:r>
+              <a:rPr lang="en" b="1">
+                <a:solidFill>
+                  <a:srgbClr val="3C78D8"/>
+                </a:solidFill>
+                <a:latin typeface="Calibri"/>
+                <a:ea typeface="Calibri"/>
+                <a:cs typeface="Calibri"/>
+                <a:sym typeface="Calibri"/>
+              </a:rPr>
               <a:t>OpenClaw Updates</a:t>
             </a:r>
             <a:endParaRPr b="1">
@@ -14693,7 +14856,7 @@
         <p:spPr>
           <a:xfrm>
             <a:off x="4574323" y="1521358"/>
-            <a:ext cx="4502400" cy="2819700"/>
+            <a:ext cx="4502400" cy="3250800"/>
           </a:xfrm>
           <a:prstGeom prst="rect">
             <a:avLst/>
@@ -14824,7 +14987,7 @@
                 <a:cs typeface="Calibri"/>
                 <a:sym typeface="Calibri"/>
               </a:rPr>
-              <a:t>Perplexity Health</a:t>
+              <a:t>BlinkClaw cloud agent (digital employees) platform</a:t>
             </a:r>
             <a:endParaRPr b="1">
               <a:solidFill>
@@ -14864,7 +15027,7 @@
                 <a:cs typeface="Calibri"/>
                 <a:sym typeface="Calibri"/>
               </a:rPr>
-              <a:t>OpenAI $110B funding  at a $840B valuation</a:t>
+              <a:t>Perplexity Health</a:t>
             </a:r>
             <a:endParaRPr b="1">
               <a:solidFill>
@@ -14904,7 +15067,7 @@
                 <a:cs typeface="Calibri"/>
                 <a:sym typeface="Calibri"/>
               </a:rPr>
-              <a:t>DeepSeek's Engram</a:t>
+              <a:t>OpenAI $110B funding  at a $840B valuation</a:t>
             </a:r>
             <a:endParaRPr b="1">
               <a:solidFill>
@@ -14944,7 +15107,7 @@
                 <a:cs typeface="Calibri"/>
                 <a:sym typeface="Calibri"/>
               </a:rPr>
-              <a:t>Anthropic AutoDream feature for Claude</a:t>
+              <a:t>DeepSeek's Engram</a:t>
             </a:r>
             <a:endParaRPr b="1">
               <a:solidFill>
@@ -14984,7 +15147,7 @@
                 <a:cs typeface="Calibri"/>
                 <a:sym typeface="Calibri"/>
               </a:rPr>
-              <a:t>Meta's Hyperagents - Self-modification</a:t>
+              <a:t>Anthropic AutoDream feature for Claude</a:t>
             </a:r>
             <a:endParaRPr b="1">
               <a:solidFill>
@@ -15024,7 +15187,7 @@
                 <a:cs typeface="Calibri"/>
                 <a:sym typeface="Calibri"/>
               </a:rPr>
-              <a:t>OpenClaw Nerve Dashboard</a:t>
+              <a:t>Meta's Hyperagents - Self-modification</a:t>
             </a:r>
             <a:endParaRPr b="1">
               <a:solidFill>
@@ -15064,7 +15227,7 @@
                 <a:cs typeface="Calibri"/>
                 <a:sym typeface="Calibri"/>
               </a:rPr>
-              <a:t>Claude AI + Obsidian = Your Own JARVIS</a:t>
+              <a:t>OpenClaw Nerve Dashboard</a:t>
             </a:r>
             <a:endParaRPr b="1">
               <a:solidFill>
@@ -15104,7 +15267,7 @@
                 <a:cs typeface="Calibri"/>
                 <a:sym typeface="Calibri"/>
               </a:rPr>
-              <a:t>Hermes Agent by News Research - Self-improving</a:t>
+              <a:t>Claude AI + Obsidian = Your Own JARVIS</a:t>
             </a:r>
             <a:endParaRPr b="1">
               <a:solidFill>
@@ -15144,7 +15307,7 @@
                 <a:cs typeface="Calibri"/>
                 <a:sym typeface="Calibri"/>
               </a:rPr>
-              <a:t>Claude + Collaborator</a:t>
+              <a:t>Hermes Agent by News Research - Self-improving</a:t>
             </a:r>
             <a:endParaRPr b="1">
               <a:solidFill>
@@ -15184,7 +15347,7 @@
                 <a:cs typeface="Calibri"/>
                 <a:sym typeface="Calibri"/>
               </a:rPr>
-              <a:t>I Made Claude My Co-Founder</a:t>
+              <a:t>Claude + Collaborator</a:t>
             </a:r>
             <a:endParaRPr b="1">
               <a:solidFill>
@@ -15224,7 +15387,87 @@
                 <a:cs typeface="Calibri"/>
                 <a:sym typeface="Calibri"/>
               </a:rPr>
+              <a:t>I Made Claude My Co-Founder</a:t>
+            </a:r>
+            <a:endParaRPr b="1">
+              <a:solidFill>
+                <a:srgbClr val="3C78D8"/>
+              </a:solidFill>
+              <a:latin typeface="Calibri"/>
+              <a:ea typeface="Calibri"/>
+              <a:cs typeface="Calibri"/>
+              <a:sym typeface="Calibri"/>
+            </a:endParaRPr>
+          </a:p>
+          <a:p>
+            <a:pPr marL="228600" marR="0" lvl="0" indent="-203200" algn="l" rtl="0">
+              <a:lnSpc>
+                <a:spcPct val="100000"/>
+              </a:lnSpc>
+              <a:spcBef>
+                <a:spcPts val="0"/>
+              </a:spcBef>
+              <a:spcAft>
+                <a:spcPts val="0"/>
+              </a:spcAft>
+              <a:buClr>
+                <a:srgbClr val="3C78D8"/>
+              </a:buClr>
+              <a:buSzPts val="1400"/>
+              <a:buFont typeface="Calibri"/>
+              <a:buChar char="●"/>
+            </a:pPr>
+            <a:r>
+              <a:rPr lang="en" b="1">
+                <a:solidFill>
+                  <a:srgbClr val="3C78D8"/>
+                </a:solidFill>
+                <a:latin typeface="Calibri"/>
+                <a:ea typeface="Calibri"/>
+                <a:cs typeface="Calibri"/>
+                <a:sym typeface="Calibri"/>
+              </a:rPr>
               <a:t>Claude Chrome Extension</a:t>
+            </a:r>
+            <a:endParaRPr b="1">
+              <a:solidFill>
+                <a:srgbClr val="3C78D8"/>
+              </a:solidFill>
+              <a:latin typeface="Calibri"/>
+              <a:ea typeface="Calibri"/>
+              <a:cs typeface="Calibri"/>
+              <a:sym typeface="Calibri"/>
+            </a:endParaRPr>
+          </a:p>
+          <a:p>
+            <a:pPr marL="228600" marR="0" lvl="0" indent="-203200" algn="l" rtl="0">
+              <a:lnSpc>
+                <a:spcPct val="100000"/>
+              </a:lnSpc>
+              <a:spcBef>
+                <a:spcPts val="0"/>
+              </a:spcBef>
+              <a:spcAft>
+                <a:spcPts val="0"/>
+              </a:spcAft>
+              <a:buClr>
+                <a:srgbClr val="3C78D8"/>
+              </a:buClr>
+              <a:buSzPts val="1400"/>
+              <a:buFont typeface="Calibri"/>
+              <a:buChar char="●"/>
+            </a:pPr>
+            <a:r>
+              <a:rPr lang="en" b="1">
+                <a:solidFill>
+                  <a:srgbClr val="3C78D8"/>
+                </a:solidFill>
+                <a:latin typeface="Calibri"/>
+                <a:ea typeface="Calibri"/>
+                <a:cs typeface="Calibri"/>
+                <a:sym typeface="Calibri"/>
+              </a:rPr>
+              <a:t>LightLLM Compromize </a:t>
             </a:r>
             <a:endParaRPr b="1">
               <a:solidFill>
@@ -15351,7 +15594,7 @@
   <p:cSld>
     <p:spTree>
       <p:nvGrpSpPr>
-        <p:cNvPr id="1" name="Shape 141"/>
+        <p:cNvPr id="1" name="Shape 145"/>
         <p:cNvGrpSpPr/>
         <p:nvPr/>
       </p:nvGrpSpPr>
@@ -15365,7 +15608,7 @@
       </p:grpSpPr>
       <p:sp>
         <p:nvSpPr>
-          <p:cNvPr id="142" name="Google Shape;142;p24"/>
+          <p:cNvPr id="146" name="Google Shape;146;p24"/>
           <p:cNvSpPr txBox="1"/>
           <p:nvPr/>
         </p:nvSpPr>
@@ -15431,7 +15674,7 @@
       </p:sp>
       <p:sp>
         <p:nvSpPr>
-          <p:cNvPr id="143" name="Google Shape;143;p24"/>
+          <p:cNvPr id="147" name="Google Shape;147;p24"/>
           <p:cNvSpPr txBox="1"/>
           <p:nvPr/>
         </p:nvSpPr>
@@ -15518,7 +15761,7 @@
       </p:sp>
       <p:sp>
         <p:nvSpPr>
-          <p:cNvPr id="144" name="Google Shape;144;p24"/>
+          <p:cNvPr id="148" name="Google Shape;148;p24"/>
           <p:cNvSpPr txBox="1"/>
           <p:nvPr/>
         </p:nvSpPr>
@@ -15795,7 +16038,7 @@
       </p:sp>
       <p:pic>
         <p:nvPicPr>
-          <p:cNvPr id="145" name="Google Shape;145;p24"/>
+          <p:cNvPr id="149" name="Google Shape;149;p24"/>
           <p:cNvPicPr preferRelativeResize="0"/>
           <p:nvPr/>
         </p:nvPicPr>
@@ -15834,7 +16077,7 @@
       </p:pic>
       <p:sp>
         <p:nvSpPr>
-          <p:cNvPr id="146" name="Google Shape;146;p24"/>
+          <p:cNvPr id="150" name="Google Shape;150;p24"/>
           <p:cNvSpPr txBox="1"/>
           <p:nvPr/>
         </p:nvSpPr>
@@ -16041,7 +16284,7 @@
       </p:sp>
       <p:sp>
         <p:nvSpPr>
-          <p:cNvPr id="147" name="Google Shape;147;p24"/>
+          <p:cNvPr id="151" name="Google Shape;151;p24"/>
           <p:cNvSpPr txBox="1"/>
           <p:nvPr/>
         </p:nvSpPr>
@@ -16251,7 +16494,7 @@
       </p:sp>
       <p:pic>
         <p:nvPicPr>
-          <p:cNvPr id="148" name="Google Shape;148;p24"/>
+          <p:cNvPr id="152" name="Google Shape;152;p24"/>
           <p:cNvPicPr preferRelativeResize="0"/>
           <p:nvPr/>
         </p:nvPicPr>
@@ -16301,7 +16544,7 @@
   <p:cSld>
     <p:spTree>
       <p:nvGrpSpPr>
-        <p:cNvPr id="1" name="Shape 152"/>
+        <p:cNvPr id="1" name="Shape 156"/>
         <p:cNvGrpSpPr/>
         <p:nvPr/>
       </p:nvGrpSpPr>
@@ -16315,7 +16558,7 @@
       </p:grpSpPr>
       <p:sp>
         <p:nvSpPr>
-          <p:cNvPr id="153" name="Google Shape;153;p25"/>
+          <p:cNvPr id="157" name="Google Shape;157;p25"/>
           <p:cNvSpPr txBox="1"/>
           <p:nvPr/>
         </p:nvSpPr>
@@ -16381,7 +16624,7 @@
       </p:sp>
       <p:sp>
         <p:nvSpPr>
-          <p:cNvPr id="154" name="Google Shape;154;p25"/>
+          <p:cNvPr id="158" name="Google Shape;158;p25"/>
           <p:cNvSpPr txBox="1"/>
           <p:nvPr/>
         </p:nvSpPr>
@@ -16816,7 +17059,7 @@
       </p:sp>
       <p:sp>
         <p:nvSpPr>
-          <p:cNvPr id="155" name="Google Shape;155;p25"/>
+          <p:cNvPr id="159" name="Google Shape;159;p25"/>
           <p:cNvSpPr txBox="1"/>
           <p:nvPr/>
         </p:nvSpPr>
@@ -17063,7 +17306,7 @@
       </p:sp>
       <p:pic>
         <p:nvPicPr>
-          <p:cNvPr id="156" name="Google Shape;156;p25"/>
+          <p:cNvPr id="160" name="Google Shape;160;p25"/>
           <p:cNvPicPr preferRelativeResize="0"/>
           <p:nvPr/>
         </p:nvPicPr>
@@ -17077,7 +17320,7 @@
         </p:blipFill>
         <p:spPr>
           <a:xfrm>
-            <a:off x="5418668" y="1067375"/>
+            <a:off x="4960493" y="390050"/>
             <a:ext cx="2971800" cy="1047750"/>
           </a:xfrm>
           <a:prstGeom prst="rect">
@@ -17097,7 +17340,7 @@
       </p:pic>
       <p:pic>
         <p:nvPicPr>
-          <p:cNvPr id="157" name="Google Shape;157;p25"/>
+          <p:cNvPr id="161" name="Google Shape;161;p25"/>
           <p:cNvPicPr preferRelativeResize="0"/>
           <p:nvPr/>
         </p:nvPicPr>
@@ -17116,7 +17359,7 @@
         </p:blipFill>
         <p:spPr>
           <a:xfrm>
-            <a:off x="5905497" y="3396625"/>
+            <a:off x="4960497" y="3721800"/>
             <a:ext cx="2338724" cy="1273950"/>
           </a:xfrm>
           <a:prstGeom prst="rect">
@@ -17147,7 +17390,7 @@
   <p:cSld>
     <p:spTree>
       <p:nvGrpSpPr>
-        <p:cNvPr id="1" name="Shape 161"/>
+        <p:cNvPr id="1" name="Shape 165"/>
         <p:cNvGrpSpPr/>
         <p:nvPr/>
       </p:nvGrpSpPr>
@@ -17161,7 +17404,7 @@
       </p:grpSpPr>
       <p:sp>
         <p:nvSpPr>
-          <p:cNvPr id="162" name="Google Shape;162;p26"/>
+          <p:cNvPr id="166" name="Google Shape;166;p26"/>
           <p:cNvSpPr txBox="1"/>
           <p:nvPr/>
         </p:nvSpPr>
@@ -17227,7 +17470,7 @@
       </p:sp>
       <p:sp>
         <p:nvSpPr>
-          <p:cNvPr id="163" name="Google Shape;163;p26"/>
+          <p:cNvPr id="167" name="Google Shape;167;p26"/>
           <p:cNvSpPr txBox="1"/>
           <p:nvPr/>
         </p:nvSpPr>
@@ -17951,7 +18194,7 @@
       </p:sp>
       <p:sp>
         <p:nvSpPr>
-          <p:cNvPr id="164" name="Google Shape;164;p26"/>
+          <p:cNvPr id="168" name="Google Shape;168;p26"/>
           <p:cNvSpPr txBox="1"/>
           <p:nvPr/>
         </p:nvSpPr>
@@ -18118,7 +18361,7 @@
       </p:sp>
       <p:pic>
         <p:nvPicPr>
-          <p:cNvPr id="165" name="Google Shape;165;p26"/>
+          <p:cNvPr id="169" name="Google Shape;169;p26"/>
           <p:cNvPicPr preferRelativeResize="0"/>
           <p:nvPr/>
         </p:nvPicPr>
@@ -18157,7 +18400,7 @@
       </p:pic>
       <p:pic>
         <p:nvPicPr>
-          <p:cNvPr id="166" name="Google Shape;166;p26"/>
+          <p:cNvPr id="170" name="Google Shape;170;p26"/>
           <p:cNvPicPr preferRelativeResize="0"/>
           <p:nvPr/>
         </p:nvPicPr>
@@ -18196,7 +18439,7 @@
       </p:pic>
       <p:sp>
         <p:nvSpPr>
-          <p:cNvPr id="167" name="Google Shape;167;p26"/>
+          <p:cNvPr id="171" name="Google Shape;171;p26"/>
           <p:cNvSpPr txBox="1"/>
           <p:nvPr/>
         </p:nvSpPr>
@@ -18350,7 +18593,7 @@
       </p:sp>
       <p:pic>
         <p:nvPicPr>
-          <p:cNvPr id="168" name="Google Shape;168;p26"/>
+          <p:cNvPr id="172" name="Google Shape;172;p26"/>
           <p:cNvPicPr preferRelativeResize="0"/>
           <p:nvPr/>
         </p:nvPicPr>
@@ -18394,7 +18637,7 @@
   <p:cSld>
     <p:spTree>
       <p:nvGrpSpPr>
-        <p:cNvPr id="1" name="Shape 172"/>
+        <p:cNvPr id="1" name="Shape 176"/>
         <p:cNvGrpSpPr/>
         <p:nvPr/>
       </p:nvGrpSpPr>
@@ -18408,7 +18651,7 @@
       </p:grpSpPr>
       <p:sp>
         <p:nvSpPr>
-          <p:cNvPr id="173" name="Google Shape;173;p27"/>
+          <p:cNvPr id="177" name="Google Shape;177;p27"/>
           <p:cNvSpPr txBox="1"/>
           <p:nvPr/>
         </p:nvSpPr>
@@ -18474,7 +18717,7 @@
       </p:sp>
       <p:sp>
         <p:nvSpPr>
-          <p:cNvPr id="174" name="Google Shape;174;p27"/>
+          <p:cNvPr id="178" name="Google Shape;178;p27"/>
           <p:cNvSpPr txBox="1"/>
           <p:nvPr/>
         </p:nvSpPr>
@@ -18921,7 +19164,7 @@
       </p:sp>
       <p:pic>
         <p:nvPicPr>
-          <p:cNvPr id="175" name="Google Shape;175;p27"/>
+          <p:cNvPr id="179" name="Google Shape;179;p27"/>
           <p:cNvPicPr preferRelativeResize="0"/>
           <p:nvPr/>
         </p:nvPicPr>
@@ -18971,7 +19214,7 @@
   <p:cSld>
     <p:spTree>
       <p:nvGrpSpPr>
-        <p:cNvPr id="1" name="Shape 179"/>
+        <p:cNvPr id="1" name="Shape 183"/>
         <p:cNvGrpSpPr/>
         <p:nvPr/>
       </p:nvGrpSpPr>
@@ -18985,7 +19228,7 @@
       </p:grpSpPr>
       <p:sp>
         <p:nvSpPr>
-          <p:cNvPr id="180" name="Google Shape;180;p28"/>
+          <p:cNvPr id="184" name="Google Shape;184;p28"/>
           <p:cNvSpPr txBox="1"/>
           <p:nvPr/>
         </p:nvSpPr>
@@ -19051,7 +19294,7 @@
       </p:sp>
       <p:sp>
         <p:nvSpPr>
-          <p:cNvPr id="181" name="Google Shape;181;p28"/>
+          <p:cNvPr id="185" name="Google Shape;185;p28"/>
           <p:cNvSpPr txBox="1"/>
           <p:nvPr/>
         </p:nvSpPr>
@@ -19405,7 +19648,7 @@
       </p:sp>
       <p:pic>
         <p:nvPicPr>
-          <p:cNvPr id="182" name="Google Shape;182;p28"/>
+          <p:cNvPr id="186" name="Google Shape;186;p28"/>
           <p:cNvPicPr preferRelativeResize="0"/>
           <p:nvPr/>
         </p:nvPicPr>
@@ -19444,7 +19687,7 @@
       </p:pic>
       <p:sp>
         <p:nvSpPr>
-          <p:cNvPr id="183" name="Google Shape;183;p28"/>
+          <p:cNvPr id="187" name="Google Shape;187;p28"/>
           <p:cNvSpPr txBox="1"/>
           <p:nvPr/>
         </p:nvSpPr>
@@ -19633,7 +19876,7 @@
   <p:cSld>
     <p:spTree>
       <p:nvGrpSpPr>
-        <p:cNvPr id="1" name="Shape 187"/>
+        <p:cNvPr id="1" name="Shape 191"/>
         <p:cNvGrpSpPr/>
         <p:nvPr/>
       </p:nvGrpSpPr>
@@ -19647,7 +19890,7 @@
       </p:grpSpPr>
       <p:sp>
         <p:nvSpPr>
-          <p:cNvPr id="188" name="Google Shape;188;p29"/>
+          <p:cNvPr id="192" name="Google Shape;192;p29"/>
           <p:cNvSpPr txBox="1"/>
           <p:nvPr/>
         </p:nvSpPr>
@@ -19713,7 +19956,7 @@
       </p:sp>
       <p:sp>
         <p:nvSpPr>
-          <p:cNvPr id="189" name="Google Shape;189;p29"/>
+          <p:cNvPr id="193" name="Google Shape;193;p29"/>
           <p:cNvSpPr txBox="1"/>
           <p:nvPr/>
         </p:nvSpPr>
@@ -20280,7 +20523,7 @@
       </p:sp>
       <p:pic>
         <p:nvPicPr>
-          <p:cNvPr id="190" name="Google Shape;190;p29"/>
+          <p:cNvPr id="194" name="Google Shape;194;p29"/>
           <p:cNvPicPr preferRelativeResize="0"/>
           <p:nvPr/>
         </p:nvPicPr>
@@ -20330,7 +20573,7 @@
   <p:cSld>
     <p:spTree>
       <p:nvGrpSpPr>
-        <p:cNvPr id="1" name="Shape 194"/>
+        <p:cNvPr id="1" name="Shape 198"/>
         <p:cNvGrpSpPr/>
         <p:nvPr/>
       </p:nvGrpSpPr>
@@ -20344,7 +20587,7 @@
       </p:grpSpPr>
       <p:sp>
         <p:nvSpPr>
-          <p:cNvPr id="195" name="Google Shape;195;p30"/>
+          <p:cNvPr id="199" name="Google Shape;199;p30"/>
           <p:cNvSpPr txBox="1"/>
           <p:nvPr/>
         </p:nvSpPr>
@@ -20410,7 +20653,7 @@
       </p:sp>
       <p:sp>
         <p:nvSpPr>
-          <p:cNvPr id="196" name="Google Shape;196;p30"/>
+          <p:cNvPr id="200" name="Google Shape;200;p30"/>
           <p:cNvSpPr txBox="1"/>
           <p:nvPr/>
         </p:nvSpPr>
@@ -21098,7 +21341,7 @@
       </p:sp>
       <p:pic>
         <p:nvPicPr>
-          <p:cNvPr id="197" name="Google Shape;197;p30"/>
+          <p:cNvPr id="201" name="Google Shape;201;p30"/>
           <p:cNvPicPr preferRelativeResize="0"/>
           <p:nvPr/>
         </p:nvPicPr>
@@ -21126,7 +21369,7 @@
       </p:pic>
       <p:pic>
         <p:nvPicPr>
-          <p:cNvPr id="198" name="Google Shape;198;p30"/>
+          <p:cNvPr id="202" name="Google Shape;202;p30"/>
           <p:cNvPicPr preferRelativeResize="0"/>
           <p:nvPr/>
         </p:nvPicPr>
@@ -21176,7 +21419,7 @@
   <p:cSld>
     <p:spTree>
       <p:nvGrpSpPr>
-        <p:cNvPr id="1" name="Shape 202"/>
+        <p:cNvPr id="1" name="Shape 206"/>
         <p:cNvGrpSpPr/>
         <p:nvPr/>
       </p:nvGrpSpPr>
@@ -21190,7 +21433,7 @@
       </p:grpSpPr>
       <p:sp>
         <p:nvSpPr>
-          <p:cNvPr id="203" name="Google Shape;203;p31"/>
+          <p:cNvPr id="207" name="Google Shape;207;p31"/>
           <p:cNvSpPr txBox="1"/>
           <p:nvPr/>
         </p:nvSpPr>
@@ -21256,7 +21499,7 @@
       </p:sp>
       <p:sp>
         <p:nvSpPr>
-          <p:cNvPr id="204" name="Google Shape;204;p31"/>
+          <p:cNvPr id="208" name="Google Shape;208;p31"/>
           <p:cNvSpPr txBox="1"/>
           <p:nvPr/>
         </p:nvSpPr>
@@ -21939,7 +22182,7 @@
       </p:sp>
       <p:pic>
         <p:nvPicPr>
-          <p:cNvPr id="205" name="Google Shape;205;p31"/>
+          <p:cNvPr id="209" name="Google Shape;209;p31"/>
           <p:cNvPicPr preferRelativeResize="0"/>
           <p:nvPr/>
         </p:nvPicPr>
@@ -21978,7 +22221,7 @@
       </p:pic>
       <p:pic>
         <p:nvPicPr>
-          <p:cNvPr id="206" name="Google Shape;206;p31"/>
+          <p:cNvPr id="210" name="Google Shape;210;p31"/>
           <p:cNvPicPr preferRelativeResize="0"/>
           <p:nvPr/>
         </p:nvPicPr>
@@ -22023,7 +22266,7 @@
   <p:cSld>
     <p:spTree>
       <p:nvGrpSpPr>
-        <p:cNvPr id="1" name="Shape 210"/>
+        <p:cNvPr id="1" name="Shape 214"/>
         <p:cNvGrpSpPr/>
         <p:nvPr/>
       </p:nvGrpSpPr>
@@ -22037,7 +22280,7 @@
       </p:grpSpPr>
       <p:sp>
         <p:nvSpPr>
-          <p:cNvPr id="211" name="Google Shape;211;p32"/>
+          <p:cNvPr id="215" name="Google Shape;215;p32"/>
           <p:cNvSpPr txBox="1"/>
           <p:nvPr/>
         </p:nvSpPr>
@@ -22103,7 +22346,7 @@
       </p:sp>
       <p:sp>
         <p:nvSpPr>
-          <p:cNvPr id="212" name="Google Shape;212;p32"/>
+          <p:cNvPr id="216" name="Google Shape;216;p32"/>
           <p:cNvSpPr txBox="1"/>
           <p:nvPr/>
         </p:nvSpPr>
@@ -22630,7 +22873,7 @@
       </p:sp>
       <p:pic>
         <p:nvPicPr>
-          <p:cNvPr id="213" name="Google Shape;213;p32"/>
+          <p:cNvPr id="217" name="Google Shape;217;p32"/>
           <p:cNvPicPr preferRelativeResize="0"/>
           <p:nvPr/>
         </p:nvPicPr>
@@ -22649,8 +22892,254 @@
         </p:blipFill>
         <p:spPr>
           <a:xfrm>
-            <a:off x="5195800" y="824750"/>
+            <a:off x="5195800" y="292675"/>
             <a:ext cx="3795800" cy="2098854"/>
+          </a:xfrm>
+          <a:prstGeom prst="rect">
+            <a:avLst/>
+          </a:prstGeom>
+          <a:noFill/>
+          <a:ln w="9525" cap="flat" cmpd="sng">
+            <a:solidFill>
+              <a:srgbClr val="FF0000"/>
+            </a:solidFill>
+            <a:prstDash val="solid"/>
+            <a:round/>
+            <a:headEnd type="none" w="sm" len="sm"/>
+            <a:tailEnd type="none" w="sm" len="sm"/>
+          </a:ln>
+        </p:spPr>
+      </p:pic>
+      <p:sp>
+        <p:nvSpPr>
+          <p:cNvPr id="218" name="Google Shape;218;p32"/>
+          <p:cNvSpPr txBox="1"/>
+          <p:nvPr/>
+        </p:nvSpPr>
+        <p:spPr>
+          <a:xfrm>
+            <a:off x="5195800" y="3917275"/>
+            <a:ext cx="3882600" cy="1126800"/>
+          </a:xfrm>
+          <a:prstGeom prst="rect">
+            <a:avLst/>
+          </a:prstGeom>
+          <a:solidFill>
+            <a:srgbClr val="FFF2CC"/>
+          </a:solidFill>
+          <a:ln w="9525" cap="flat" cmpd="sng">
+            <a:solidFill>
+              <a:srgbClr val="FF0000"/>
+            </a:solidFill>
+            <a:prstDash val="solid"/>
+            <a:round/>
+            <a:headEnd type="none" w="sm" len="sm"/>
+            <a:tailEnd type="none" w="sm" len="sm"/>
+          </a:ln>
+        </p:spPr>
+        <p:txBody>
+          <a:bodyPr spcFirstLastPara="1" wrap="square" lIns="9125" tIns="9125" rIns="9125" bIns="9125" anchor="t" anchorCtr="0">
+            <a:spAutoFit/>
+          </a:bodyPr>
+          <a:lstStyle/>
+          <a:p>
+            <a:pPr marL="171450" marR="0" lvl="0" indent="-133350" algn="l" rtl="0">
+              <a:lnSpc>
+                <a:spcPct val="100000"/>
+              </a:lnSpc>
+              <a:spcBef>
+                <a:spcPts val="0"/>
+              </a:spcBef>
+              <a:spcAft>
+                <a:spcPts val="0"/>
+              </a:spcAft>
+              <a:buClr>
+                <a:srgbClr val="FF0000"/>
+              </a:buClr>
+              <a:buSzPts val="1200"/>
+              <a:buFont typeface="Calibri"/>
+              <a:buChar char="●"/>
+            </a:pPr>
+            <a:r>
+              <a:rPr lang="en" sz="1200" b="1">
+                <a:solidFill>
+                  <a:srgbClr val="FF0000"/>
+                </a:solidFill>
+                <a:latin typeface="Calibri"/>
+                <a:ea typeface="Calibri"/>
+                <a:cs typeface="Calibri"/>
+                <a:sym typeface="Calibri"/>
+              </a:rPr>
+              <a:t>BlinkClaw cloud agent (digital employees) platform</a:t>
+            </a:r>
+            <a:endParaRPr sz="1200" b="1">
+              <a:solidFill>
+                <a:srgbClr val="FF0000"/>
+              </a:solidFill>
+              <a:latin typeface="Calibri"/>
+              <a:ea typeface="Calibri"/>
+              <a:cs typeface="Calibri"/>
+              <a:sym typeface="Calibri"/>
+            </a:endParaRPr>
+          </a:p>
+          <a:p>
+            <a:pPr marL="171450" marR="0" lvl="0" indent="-133350" algn="l" rtl="0">
+              <a:lnSpc>
+                <a:spcPct val="100000"/>
+              </a:lnSpc>
+              <a:spcBef>
+                <a:spcPts val="0"/>
+              </a:spcBef>
+              <a:spcAft>
+                <a:spcPts val="0"/>
+              </a:spcAft>
+              <a:buClr>
+                <a:schemeClr val="dk1"/>
+              </a:buClr>
+              <a:buSzPts val="1200"/>
+              <a:buFont typeface="Calibri"/>
+              <a:buChar char="●"/>
+            </a:pPr>
+            <a:r>
+              <a:rPr lang="en" sz="1200" u="sng">
+                <a:solidFill>
+                  <a:schemeClr val="hlink"/>
+                </a:solidFill>
+                <a:latin typeface="Calibri"/>
+                <a:ea typeface="Calibri"/>
+                <a:cs typeface="Calibri"/>
+                <a:sym typeface="Calibri"/>
+                <a:hlinkClick r:id="rId5"/>
+              </a:rPr>
+              <a:t>https://blink.new/claw</a:t>
+            </a:r>
+            <a:r>
+              <a:rPr lang="en" sz="1200">
+                <a:solidFill>
+                  <a:schemeClr val="dk1"/>
+                </a:solidFill>
+                <a:latin typeface="Calibri"/>
+                <a:ea typeface="Calibri"/>
+                <a:cs typeface="Calibri"/>
+                <a:sym typeface="Calibri"/>
+              </a:rPr>
+              <a:t> </a:t>
+            </a:r>
+            <a:endParaRPr sz="1200">
+              <a:solidFill>
+                <a:schemeClr val="dk1"/>
+              </a:solidFill>
+              <a:latin typeface="Calibri"/>
+              <a:ea typeface="Calibri"/>
+              <a:cs typeface="Calibri"/>
+              <a:sym typeface="Calibri"/>
+            </a:endParaRPr>
+          </a:p>
+          <a:p>
+            <a:pPr marL="171450" marR="0" lvl="0" indent="-133350" algn="l" rtl="0">
+              <a:lnSpc>
+                <a:spcPct val="100000"/>
+              </a:lnSpc>
+              <a:spcBef>
+                <a:spcPts val="0"/>
+              </a:spcBef>
+              <a:spcAft>
+                <a:spcPts val="0"/>
+              </a:spcAft>
+              <a:buClr>
+                <a:schemeClr val="dk1"/>
+              </a:buClr>
+              <a:buSzPts val="1200"/>
+              <a:buFont typeface="Calibri"/>
+              <a:buChar char="●"/>
+            </a:pPr>
+            <a:r>
+              <a:rPr lang="en" sz="1200">
+                <a:solidFill>
+                  <a:schemeClr val="dk1"/>
+                </a:solidFill>
+                <a:latin typeface="Calibri"/>
+                <a:ea typeface="Calibri"/>
+                <a:cs typeface="Calibri"/>
+                <a:sym typeface="Calibri"/>
+              </a:rPr>
+              <a:t>180+ AI models, zero setup</a:t>
+            </a:r>
+            <a:endParaRPr sz="1200">
+              <a:solidFill>
+                <a:schemeClr val="dk1"/>
+              </a:solidFill>
+              <a:latin typeface="Calibri"/>
+              <a:ea typeface="Calibri"/>
+              <a:cs typeface="Calibri"/>
+              <a:sym typeface="Calibri"/>
+            </a:endParaRPr>
+          </a:p>
+          <a:p>
+            <a:pPr marL="171450" marR="0" lvl="0" indent="-133350" algn="l" rtl="0">
+              <a:lnSpc>
+                <a:spcPct val="100000"/>
+              </a:lnSpc>
+              <a:spcBef>
+                <a:spcPts val="0"/>
+              </a:spcBef>
+              <a:spcAft>
+                <a:spcPts val="0"/>
+              </a:spcAft>
+              <a:buClr>
+                <a:schemeClr val="dk1"/>
+              </a:buClr>
+              <a:buSzPts val="1200"/>
+              <a:buFont typeface="Calibri"/>
+              <a:buChar char="●"/>
+            </a:pPr>
+            <a:r>
+              <a:rPr lang="en" sz="1200">
+                <a:solidFill>
+                  <a:schemeClr val="dk1"/>
+                </a:solidFill>
+                <a:latin typeface="Calibri"/>
+                <a:ea typeface="Calibri"/>
+                <a:cs typeface="Calibri"/>
+                <a:sym typeface="Calibri"/>
+              </a:rPr>
+              <a:t>business-ready AI workforce with zero infrastructure overhead, especially for automating email, CRM, Slack, and LinkedIn workflows without touching API keys or servers</a:t>
+            </a:r>
+            <a:endParaRPr sz="1200">
+              <a:solidFill>
+                <a:schemeClr val="dk1"/>
+              </a:solidFill>
+              <a:latin typeface="Calibri"/>
+              <a:ea typeface="Calibri"/>
+              <a:cs typeface="Calibri"/>
+              <a:sym typeface="Calibri"/>
+            </a:endParaRPr>
+          </a:p>
+        </p:txBody>
+      </p:sp>
+      <p:pic>
+        <p:nvPicPr>
+          <p:cNvPr id="219" name="Google Shape;219;p32"/>
+          <p:cNvPicPr preferRelativeResize="0"/>
+          <p:nvPr/>
+        </p:nvPicPr>
+        <p:blipFill>
+          <a:blip r:embed="rId6" cstate="email">
+            <a:alphaModFix/>
+            <a:extLst>
+              <a:ext uri="{28A0092B-C50C-407E-A947-70E740481C1C}">
+                <a14:useLocalDpi xmlns:a14="http://schemas.microsoft.com/office/drawing/2010/main"/>
+              </a:ext>
+            </a:extLst>
+          </a:blip>
+          <a:stretch>
+            <a:fillRect/>
+          </a:stretch>
+        </p:blipFill>
+        <p:spPr>
+          <a:xfrm>
+            <a:off x="2456700" y="4084072"/>
+            <a:ext cx="2541175" cy="793200"/>
           </a:xfrm>
           <a:prstGeom prst="rect">
             <a:avLst/>
@@ -22680,7 +23169,7 @@
   <p:cSld>
     <p:spTree>
       <p:nvGrpSpPr>
-        <p:cNvPr id="1" name="Shape 217"/>
+        <p:cNvPr id="1" name="Shape 223"/>
         <p:cNvGrpSpPr/>
         <p:nvPr/>
       </p:nvGrpSpPr>
@@ -22694,7 +23183,7 @@
       </p:grpSpPr>
       <p:sp>
         <p:nvSpPr>
-          <p:cNvPr id="218" name="Google Shape;218;p33"/>
+          <p:cNvPr id="224" name="Google Shape;224;p33"/>
           <p:cNvSpPr txBox="1"/>
           <p:nvPr/>
         </p:nvSpPr>
@@ -22760,7 +23249,7 @@
       </p:sp>
       <p:sp>
         <p:nvSpPr>
-          <p:cNvPr id="219" name="Google Shape;219;p33"/>
+          <p:cNvPr id="225" name="Google Shape;225;p33"/>
           <p:cNvSpPr txBox="1"/>
           <p:nvPr/>
         </p:nvSpPr>
@@ -22846,7 +23335,7 @@
       </p:sp>
       <p:sp>
         <p:nvSpPr>
-          <p:cNvPr id="220" name="Google Shape;220;p33"/>
+          <p:cNvPr id="226" name="Google Shape;226;p33"/>
           <p:cNvSpPr txBox="1"/>
           <p:nvPr/>
         </p:nvSpPr>
@@ -22932,7 +23421,7 @@
       </p:sp>
       <p:sp>
         <p:nvSpPr>
-          <p:cNvPr id="221" name="Google Shape;221;p33"/>
+          <p:cNvPr id="227" name="Google Shape;227;p33"/>
           <p:cNvSpPr txBox="1"/>
           <p:nvPr/>
         </p:nvSpPr>
@@ -23138,7 +23627,7 @@
       </p:sp>
       <p:pic>
         <p:nvPicPr>
-          <p:cNvPr id="222" name="Google Shape;222;p33"/>
+          <p:cNvPr id="228" name="Google Shape;228;p33"/>
           <p:cNvPicPr preferRelativeResize="0"/>
           <p:nvPr/>
         </p:nvPicPr>
@@ -23172,7 +23661,7 @@
       </p:pic>
       <p:pic>
         <p:nvPicPr>
-          <p:cNvPr id="223" name="Google Shape;223;p33"/>
+          <p:cNvPr id="229" name="Google Shape;229;p33"/>
           <p:cNvPicPr preferRelativeResize="0"/>
           <p:nvPr/>
         </p:nvPicPr>
@@ -23211,7 +23700,7 @@
       </p:pic>
       <p:pic>
         <p:nvPicPr>
-          <p:cNvPr id="224" name="Google Shape;224;p33"/>
+          <p:cNvPr id="230" name="Google Shape;230;p33"/>
           <p:cNvPicPr preferRelativeResize="0"/>
           <p:nvPr/>
         </p:nvPicPr>
@@ -24991,7 +25480,7 @@
             <a:tbl>
               <a:tblPr>
                 <a:noFill/>
-                <a:tableStyleId>{378060D3-E47D-442D-BAAC-3F8D07A33644}</a:tableStyleId>
+                <a:tableStyleId>{C6011692-C5DE-43AD-8B3B-9AB0577BAD23}</a:tableStyleId>
               </a:tblPr>
               <a:tblGrid>
                 <a:gridCol w="219050">
@@ -25360,7 +25849,7 @@
             <a:tbl>
               <a:tblPr>
                 <a:noFill/>
-                <a:tableStyleId>{378060D3-E47D-442D-BAAC-3F8D07A33644}</a:tableStyleId>
+                <a:tableStyleId>{C6011692-C5DE-43AD-8B3B-9AB0577BAD23}</a:tableStyleId>
               </a:tblPr>
               <a:tblGrid>
                 <a:gridCol w="247650">
@@ -31695,7 +32184,7 @@
             <a:tbl>
               <a:tblPr>
                 <a:noFill/>
-                <a:tableStyleId>{378060D3-E47D-442D-BAAC-3F8D07A33644}</a:tableStyleId>
+                <a:tableStyleId>{C6011692-C5DE-43AD-8B3B-9AB0577BAD23}</a:tableStyleId>
               </a:tblPr>
               <a:tblGrid>
                 <a:gridCol w="247650">
@@ -38016,7 +38505,7 @@
   <p:cSld>
     <p:spTree>
       <p:nvGrpSpPr>
-        <p:cNvPr id="1" name="Shape 228"/>
+        <p:cNvPr id="1" name="Shape 234"/>
         <p:cNvGrpSpPr/>
         <p:nvPr/>
       </p:nvGrpSpPr>
@@ -38030,7 +38519,7 @@
       </p:grpSpPr>
       <p:sp>
         <p:nvSpPr>
-          <p:cNvPr id="229" name="Google Shape;229;p34"/>
+          <p:cNvPr id="235" name="Google Shape;235;p34"/>
           <p:cNvSpPr txBox="1"/>
           <p:nvPr/>
         </p:nvSpPr>
@@ -38096,7 +38585,7 @@
       </p:sp>
       <p:sp>
         <p:nvSpPr>
-          <p:cNvPr id="230" name="Google Shape;230;p34"/>
+          <p:cNvPr id="236" name="Google Shape;236;p34"/>
           <p:cNvSpPr txBox="1"/>
           <p:nvPr/>
         </p:nvSpPr>
@@ -38579,7 +39068,7 @@
       </p:sp>
       <p:sp>
         <p:nvSpPr>
-          <p:cNvPr id="231" name="Google Shape;231;p34"/>
+          <p:cNvPr id="237" name="Google Shape;237;p34"/>
           <p:cNvSpPr txBox="1"/>
           <p:nvPr/>
         </p:nvSpPr>
@@ -38826,7 +39315,7 @@
       </p:sp>
       <p:sp>
         <p:nvSpPr>
-          <p:cNvPr id="232" name="Google Shape;232;p34"/>
+          <p:cNvPr id="238" name="Google Shape;238;p34"/>
           <p:cNvSpPr txBox="1"/>
           <p:nvPr/>
         </p:nvSpPr>
@@ -39117,7 +39606,7 @@
       </p:sp>
       <p:pic>
         <p:nvPicPr>
-          <p:cNvPr id="233" name="Google Shape;233;p34"/>
+          <p:cNvPr id="239" name="Google Shape;239;p34"/>
           <p:cNvPicPr preferRelativeResize="0"/>
           <p:nvPr/>
         </p:nvPicPr>
@@ -39156,7 +39645,7 @@
       </p:pic>
       <p:pic>
         <p:nvPicPr>
-          <p:cNvPr id="234" name="Google Shape;234;p34"/>
+          <p:cNvPr id="240" name="Google Shape;240;p34"/>
           <p:cNvPicPr preferRelativeResize="0"/>
           <p:nvPr/>
         </p:nvPicPr>
@@ -39195,7 +39684,7 @@
       </p:pic>
       <p:pic>
         <p:nvPicPr>
-          <p:cNvPr id="235" name="Google Shape;235;p34"/>
+          <p:cNvPr id="241" name="Google Shape;241;p34"/>
           <p:cNvPicPr preferRelativeResize="0"/>
           <p:nvPr/>
         </p:nvPicPr>
@@ -39245,7 +39734,7 @@
   <p:cSld>
     <p:spTree>
       <p:nvGrpSpPr>
-        <p:cNvPr id="1" name="Shape 239"/>
+        <p:cNvPr id="1" name="Shape 245"/>
         <p:cNvGrpSpPr/>
         <p:nvPr/>
       </p:nvGrpSpPr>
@@ -39259,7 +39748,7 @@
       </p:grpSpPr>
       <p:sp>
         <p:nvSpPr>
-          <p:cNvPr id="240" name="Google Shape;240;p35"/>
+          <p:cNvPr id="246" name="Google Shape;246;p35"/>
           <p:cNvSpPr txBox="1"/>
           <p:nvPr/>
         </p:nvSpPr>
@@ -39325,7 +39814,7 @@
       </p:sp>
       <p:sp>
         <p:nvSpPr>
-          <p:cNvPr id="241" name="Google Shape;241;p35"/>
+          <p:cNvPr id="247" name="Google Shape;247;p35"/>
           <p:cNvSpPr txBox="1"/>
           <p:nvPr/>
         </p:nvSpPr>
@@ -39543,7 +40032,7 @@
       </p:sp>
       <p:sp>
         <p:nvSpPr>
-          <p:cNvPr id="242" name="Google Shape;242;p35"/>
+          <p:cNvPr id="248" name="Google Shape;248;p35"/>
           <p:cNvSpPr txBox="1"/>
           <p:nvPr/>
         </p:nvSpPr>
@@ -39814,7 +40303,7 @@
       </p:sp>
       <p:pic>
         <p:nvPicPr>
-          <p:cNvPr id="243" name="Google Shape;243;p35"/>
+          <p:cNvPr id="249" name="Google Shape;249;p35"/>
           <p:cNvPicPr preferRelativeResize="0"/>
           <p:nvPr/>
         </p:nvPicPr>
@@ -39853,7 +40342,7 @@
       </p:pic>
       <p:pic>
         <p:nvPicPr>
-          <p:cNvPr id="244" name="Google Shape;244;p35"/>
+          <p:cNvPr id="250" name="Google Shape;250;p35"/>
           <p:cNvPicPr preferRelativeResize="0"/>
           <p:nvPr/>
         </p:nvPicPr>
@@ -39903,7 +40392,7 @@
   <p:cSld>
     <p:spTree>
       <p:nvGrpSpPr>
-        <p:cNvPr id="1" name="Shape 248"/>
+        <p:cNvPr id="1" name="Shape 254"/>
         <p:cNvGrpSpPr/>
         <p:nvPr/>
       </p:nvGrpSpPr>
@@ -39917,7 +40406,7 @@
       </p:grpSpPr>
       <p:sp>
         <p:nvSpPr>
-          <p:cNvPr id="249" name="Google Shape;249;p36"/>
+          <p:cNvPr id="255" name="Google Shape;255;p36"/>
           <p:cNvSpPr txBox="1"/>
           <p:nvPr/>
         </p:nvSpPr>
@@ -39983,7 +40472,7 @@
       </p:sp>
       <p:sp>
         <p:nvSpPr>
-          <p:cNvPr id="250" name="Google Shape;250;p36"/>
+          <p:cNvPr id="256" name="Google Shape;256;p36"/>
           <p:cNvSpPr txBox="1"/>
           <p:nvPr/>
         </p:nvSpPr>
@@ -40270,7 +40759,7 @@
       </p:sp>
       <p:sp>
         <p:nvSpPr>
-          <p:cNvPr id="251" name="Google Shape;251;p36"/>
+          <p:cNvPr id="257" name="Google Shape;257;p36"/>
           <p:cNvSpPr txBox="1"/>
           <p:nvPr/>
         </p:nvSpPr>
@@ -40569,7 +41058,7 @@
       </p:sp>
       <p:sp>
         <p:nvSpPr>
-          <p:cNvPr id="252" name="Google Shape;252;p36"/>
+          <p:cNvPr id="258" name="Google Shape;258;p36"/>
           <p:cNvSpPr txBox="1"/>
           <p:nvPr/>
         </p:nvSpPr>
@@ -40868,7 +41357,7 @@
       </p:sp>
       <p:pic>
         <p:nvPicPr>
-          <p:cNvPr id="253" name="Google Shape;253;p36"/>
+          <p:cNvPr id="259" name="Google Shape;259;p36"/>
           <p:cNvPicPr preferRelativeResize="0"/>
           <p:nvPr/>
         </p:nvPicPr>
@@ -40918,7 +41407,7 @@
   <p:cSld>
     <p:spTree>
       <p:nvGrpSpPr>
-        <p:cNvPr id="1" name="Shape 257"/>
+        <p:cNvPr id="1" name="Shape 263"/>
         <p:cNvGrpSpPr/>
         <p:nvPr/>
       </p:nvGrpSpPr>
@@ -40932,7 +41421,7 @@
       </p:grpSpPr>
       <p:sp>
         <p:nvSpPr>
-          <p:cNvPr id="258" name="Google Shape;258;p37"/>
+          <p:cNvPr id="264" name="Google Shape;264;p37"/>
           <p:cNvSpPr txBox="1"/>
           <p:nvPr/>
         </p:nvSpPr>
@@ -40998,7 +41487,7 @@
       </p:sp>
       <p:sp>
         <p:nvSpPr>
-          <p:cNvPr id="259" name="Google Shape;259;p37"/>
+          <p:cNvPr id="265" name="Google Shape;265;p37"/>
           <p:cNvSpPr txBox="1"/>
           <p:nvPr/>
         </p:nvSpPr>
@@ -41498,7 +41987,7 @@
       </p:sp>
       <p:pic>
         <p:nvPicPr>
-          <p:cNvPr id="260" name="Google Shape;260;p37"/>
+          <p:cNvPr id="266" name="Google Shape;266;p37"/>
           <p:cNvPicPr preferRelativeResize="0"/>
           <p:nvPr/>
         </p:nvPicPr>
@@ -41548,7 +42037,7 @@
   <p:cSld>
     <p:spTree>
       <p:nvGrpSpPr>
-        <p:cNvPr id="1" name="Shape 264"/>
+        <p:cNvPr id="1" name="Shape 270"/>
         <p:cNvGrpSpPr/>
         <p:nvPr/>
       </p:nvGrpSpPr>
@@ -41562,7 +42051,7 @@
       </p:grpSpPr>
       <p:sp>
         <p:nvSpPr>
-          <p:cNvPr id="265" name="Google Shape;265;p38"/>
+          <p:cNvPr id="271" name="Google Shape;271;p38"/>
           <p:cNvSpPr txBox="1"/>
           <p:nvPr/>
         </p:nvSpPr>
@@ -41628,7 +42117,7 @@
       </p:sp>
       <p:pic>
         <p:nvPicPr>
-          <p:cNvPr id="266" name="Google Shape;266;p38" title="Screenshot 2026-03-19 at 8.36.21 AM.png"/>
+          <p:cNvPr id="272" name="Google Shape;272;p38" title="Screenshot 2026-03-19 at 8.36.21 AM.png"/>
           <p:cNvPicPr preferRelativeResize="0"/>
           <p:nvPr/>
         </p:nvPicPr>
@@ -41667,7 +42156,7 @@
       </p:pic>
       <p:pic>
         <p:nvPicPr>
-          <p:cNvPr id="267" name="Google Shape;267;p38" title="Screenshot 2026-03-19 at 8.38.17 AM.png"/>
+          <p:cNvPr id="273" name="Google Shape;273;p38" title="Screenshot 2026-03-19 at 8.38.17 AM.png"/>
           <p:cNvPicPr preferRelativeResize="0"/>
           <p:nvPr/>
         </p:nvPicPr>
@@ -41717,7 +42206,7 @@
   <p:cSld>
     <p:spTree>
       <p:nvGrpSpPr>
-        <p:cNvPr id="1" name="Shape 271"/>
+        <p:cNvPr id="1" name="Shape 277"/>
         <p:cNvGrpSpPr/>
         <p:nvPr/>
       </p:nvGrpSpPr>
@@ -41731,7 +42220,651 @@
       </p:grpSpPr>
       <p:sp>
         <p:nvSpPr>
-          <p:cNvPr id="272" name="Google Shape;272;p39"/>
+          <p:cNvPr id="278" name="Google Shape;278;p39"/>
+          <p:cNvSpPr txBox="1"/>
+          <p:nvPr/>
+        </p:nvSpPr>
+        <p:spPr>
+          <a:xfrm>
+            <a:off x="55075" y="63650"/>
+            <a:ext cx="2940000" cy="326400"/>
+          </a:xfrm>
+          <a:prstGeom prst="rect">
+            <a:avLst/>
+          </a:prstGeom>
+          <a:noFill/>
+          <a:ln>
+            <a:noFill/>
+          </a:ln>
+        </p:spPr>
+        <p:txBody>
+          <a:bodyPr spcFirstLastPara="1" wrap="square" lIns="9125" tIns="9125" rIns="9125" bIns="9125" anchor="t" anchorCtr="0">
+            <a:spAutoFit/>
+          </a:bodyPr>
+          <a:lstStyle/>
+          <a:p>
+            <a:pPr marL="0" marR="0" lvl="0" indent="0" algn="l" rtl="0">
+              <a:lnSpc>
+                <a:spcPct val="100000"/>
+              </a:lnSpc>
+              <a:spcBef>
+                <a:spcPts val="0"/>
+              </a:spcBef>
+              <a:spcAft>
+                <a:spcPts val="0"/>
+              </a:spcAft>
+              <a:buClr>
+                <a:schemeClr val="dk1"/>
+              </a:buClr>
+              <a:buSzPts val="1100"/>
+              <a:buFont typeface="Arial"/>
+              <a:buNone/>
+            </a:pPr>
+            <a:r>
+              <a:rPr lang="en" sz="2000" b="1">
+                <a:solidFill>
+                  <a:schemeClr val="dk1"/>
+                </a:solidFill>
+                <a:latin typeface="Calibri"/>
+                <a:ea typeface="Calibri"/>
+                <a:cs typeface="Calibri"/>
+                <a:sym typeface="Calibri"/>
+              </a:rPr>
+              <a:t>LightLLM Compromize </a:t>
+            </a:r>
+            <a:endParaRPr sz="2000" b="1">
+              <a:solidFill>
+                <a:schemeClr val="dk1"/>
+              </a:solidFill>
+              <a:latin typeface="Calibri"/>
+              <a:ea typeface="Calibri"/>
+              <a:cs typeface="Calibri"/>
+              <a:sym typeface="Calibri"/>
+            </a:endParaRPr>
+          </a:p>
+        </p:txBody>
+      </p:sp>
+      <p:sp>
+        <p:nvSpPr>
+          <p:cNvPr id="279" name="Google Shape;279;p39"/>
+          <p:cNvSpPr txBox="1"/>
+          <p:nvPr/>
+        </p:nvSpPr>
+        <p:spPr>
+          <a:xfrm>
+            <a:off x="55075" y="433000"/>
+            <a:ext cx="5014500" cy="3158400"/>
+          </a:xfrm>
+          <a:prstGeom prst="rect">
+            <a:avLst/>
+          </a:prstGeom>
+          <a:solidFill>
+            <a:srgbClr val="FFF2CC"/>
+          </a:solidFill>
+          <a:ln w="9525" cap="flat" cmpd="sng">
+            <a:solidFill>
+              <a:srgbClr val="FF0000"/>
+            </a:solidFill>
+            <a:prstDash val="solid"/>
+            <a:round/>
+            <a:headEnd type="none" w="sm" len="sm"/>
+            <a:tailEnd type="none" w="sm" len="sm"/>
+          </a:ln>
+        </p:spPr>
+        <p:txBody>
+          <a:bodyPr spcFirstLastPara="1" wrap="square" lIns="9125" tIns="9125" rIns="9125" bIns="9125" anchor="t" anchorCtr="0">
+            <a:spAutoFit/>
+          </a:bodyPr>
+          <a:lstStyle/>
+          <a:p>
+            <a:pPr marL="171450" marR="0" lvl="0" indent="-133350" algn="l" rtl="0">
+              <a:lnSpc>
+                <a:spcPct val="100000"/>
+              </a:lnSpc>
+              <a:spcBef>
+                <a:spcPts val="0"/>
+              </a:spcBef>
+              <a:spcAft>
+                <a:spcPts val="0"/>
+              </a:spcAft>
+              <a:buClr>
+                <a:schemeClr val="dk1"/>
+              </a:buClr>
+              <a:buSzPts val="1200"/>
+              <a:buFont typeface="Calibri"/>
+              <a:buChar char="●"/>
+            </a:pPr>
+            <a:r>
+              <a:rPr lang="en" sz="1200">
+                <a:solidFill>
+                  <a:schemeClr val="dk1"/>
+                </a:solidFill>
+                <a:latin typeface="Calibri"/>
+                <a:ea typeface="Calibri"/>
+                <a:cs typeface="Calibri"/>
+                <a:sym typeface="Calibri"/>
+              </a:rPr>
+              <a:t>On March 24, 2026, a threat actor group called TeamPCP (linked to LAPSUS$) compromised two LiteLLM PyPI releases — v1.82.7 and v1.82.8 — by injecting malicious code into the distributed Python wheel packages</a:t>
+            </a:r>
+            <a:endParaRPr sz="1200">
+              <a:solidFill>
+                <a:schemeClr val="dk1"/>
+              </a:solidFill>
+              <a:latin typeface="Calibri"/>
+              <a:ea typeface="Calibri"/>
+              <a:cs typeface="Calibri"/>
+              <a:sym typeface="Calibri"/>
+            </a:endParaRPr>
+          </a:p>
+          <a:p>
+            <a:pPr marL="171450" marR="0" lvl="0" indent="-133350" algn="l" rtl="0">
+              <a:lnSpc>
+                <a:spcPct val="100000"/>
+              </a:lnSpc>
+              <a:spcBef>
+                <a:spcPts val="0"/>
+              </a:spcBef>
+              <a:spcAft>
+                <a:spcPts val="0"/>
+              </a:spcAft>
+              <a:buClr>
+                <a:schemeClr val="dk1"/>
+              </a:buClr>
+              <a:buSzPts val="1200"/>
+              <a:buFont typeface="Calibri"/>
+              <a:buChar char="●"/>
+            </a:pPr>
+            <a:r>
+              <a:rPr lang="en" sz="1200">
+                <a:solidFill>
+                  <a:schemeClr val="dk1"/>
+                </a:solidFill>
+                <a:latin typeface="Calibri"/>
+                <a:ea typeface="Calibri"/>
+                <a:cs typeface="Calibri"/>
+                <a:sym typeface="Calibri"/>
+              </a:rPr>
+              <a:t>LiteLLM is an open-source Python library and proxy server that acts as a "universal translator" normalizing APIs of LLM providers into the familiar OpenAI API format</a:t>
+            </a:r>
+            <a:endParaRPr sz="1200">
+              <a:solidFill>
+                <a:schemeClr val="dk1"/>
+              </a:solidFill>
+              <a:latin typeface="Calibri"/>
+              <a:ea typeface="Calibri"/>
+              <a:cs typeface="Calibri"/>
+              <a:sym typeface="Calibri"/>
+            </a:endParaRPr>
+          </a:p>
+          <a:p>
+            <a:pPr marL="171450" marR="0" lvl="0" indent="-133350" algn="l" rtl="0">
+              <a:lnSpc>
+                <a:spcPct val="100000"/>
+              </a:lnSpc>
+              <a:spcBef>
+                <a:spcPts val="0"/>
+              </a:spcBef>
+              <a:spcAft>
+                <a:spcPts val="0"/>
+              </a:spcAft>
+              <a:buClr>
+                <a:schemeClr val="dk1"/>
+              </a:buClr>
+              <a:buSzPts val="1200"/>
+              <a:buFont typeface="Calibri"/>
+              <a:buChar char="●"/>
+            </a:pPr>
+            <a:r>
+              <a:rPr lang="en" sz="1200">
+                <a:solidFill>
+                  <a:schemeClr val="dk1"/>
+                </a:solidFill>
+                <a:latin typeface="Calibri"/>
+                <a:ea typeface="Calibri"/>
+                <a:cs typeface="Calibri"/>
+                <a:sym typeface="Calibri"/>
+              </a:rPr>
+              <a:t>LiteLLM has over 95 Mln monthly downloads</a:t>
+            </a:r>
+            <a:endParaRPr sz="1200">
+              <a:solidFill>
+                <a:schemeClr val="dk1"/>
+              </a:solidFill>
+              <a:latin typeface="Calibri"/>
+              <a:ea typeface="Calibri"/>
+              <a:cs typeface="Calibri"/>
+              <a:sym typeface="Calibri"/>
+            </a:endParaRPr>
+          </a:p>
+          <a:p>
+            <a:pPr marL="171450" marR="0" lvl="0" indent="-133350" algn="l" rtl="0">
+              <a:lnSpc>
+                <a:spcPct val="100000"/>
+              </a:lnSpc>
+              <a:spcBef>
+                <a:spcPts val="0"/>
+              </a:spcBef>
+              <a:spcAft>
+                <a:spcPts val="0"/>
+              </a:spcAft>
+              <a:buClr>
+                <a:schemeClr val="dk1"/>
+              </a:buClr>
+              <a:buSzPts val="1200"/>
+              <a:buFont typeface="Calibri"/>
+              <a:buChar char="●"/>
+            </a:pPr>
+            <a:r>
+              <a:rPr lang="en" sz="1200">
+                <a:solidFill>
+                  <a:schemeClr val="dk1"/>
+                </a:solidFill>
+                <a:latin typeface="Calibri"/>
+                <a:ea typeface="Calibri"/>
+                <a:cs typeface="Calibri"/>
+                <a:sym typeface="Calibri"/>
+              </a:rPr>
+              <a:t>The affected file - litellm/proxy/proxy_server.py</a:t>
+            </a:r>
+            <a:endParaRPr sz="1200">
+              <a:solidFill>
+                <a:schemeClr val="dk1"/>
+              </a:solidFill>
+              <a:latin typeface="Calibri"/>
+              <a:ea typeface="Calibri"/>
+              <a:cs typeface="Calibri"/>
+              <a:sym typeface="Calibri"/>
+            </a:endParaRPr>
+          </a:p>
+          <a:p>
+            <a:pPr marL="171450" marR="0" lvl="0" indent="-133350" algn="l" rtl="0">
+              <a:lnSpc>
+                <a:spcPct val="100000"/>
+              </a:lnSpc>
+              <a:spcBef>
+                <a:spcPts val="0"/>
+              </a:spcBef>
+              <a:spcAft>
+                <a:spcPts val="0"/>
+              </a:spcAft>
+              <a:buClr>
+                <a:schemeClr val="dk1"/>
+              </a:buClr>
+              <a:buSzPts val="1200"/>
+              <a:buFont typeface="Calibri"/>
+              <a:buChar char="●"/>
+            </a:pPr>
+            <a:r>
+              <a:rPr lang="en" sz="1200">
+                <a:solidFill>
+                  <a:schemeClr val="dk1"/>
+                </a:solidFill>
+                <a:latin typeface="Calibri"/>
+                <a:ea typeface="Calibri"/>
+                <a:cs typeface="Calibri"/>
+                <a:sym typeface="Calibri"/>
+              </a:rPr>
+              <a:t>It installs a hidden systemd backdoor that survived reboots and polled an attacker-controlled server for additional payloads</a:t>
+            </a:r>
+            <a:endParaRPr sz="1200">
+              <a:solidFill>
+                <a:schemeClr val="dk1"/>
+              </a:solidFill>
+              <a:latin typeface="Calibri"/>
+              <a:ea typeface="Calibri"/>
+              <a:cs typeface="Calibri"/>
+              <a:sym typeface="Calibri"/>
+            </a:endParaRPr>
+          </a:p>
+          <a:p>
+            <a:pPr marL="171450" marR="0" lvl="0" indent="-133350" algn="l" rtl="0">
+              <a:lnSpc>
+                <a:spcPct val="100000"/>
+              </a:lnSpc>
+              <a:spcBef>
+                <a:spcPts val="0"/>
+              </a:spcBef>
+              <a:spcAft>
+                <a:spcPts val="0"/>
+              </a:spcAft>
+              <a:buClr>
+                <a:schemeClr val="dk1"/>
+              </a:buClr>
+              <a:buSzPts val="1200"/>
+              <a:buFont typeface="Calibri"/>
+              <a:buChar char="●"/>
+            </a:pPr>
+            <a:r>
+              <a:rPr lang="en" sz="1200">
+                <a:solidFill>
+                  <a:schemeClr val="dk1"/>
+                </a:solidFill>
+                <a:latin typeface="Calibri"/>
+                <a:ea typeface="Calibri"/>
+                <a:cs typeface="Calibri"/>
+                <a:sym typeface="Calibri"/>
+              </a:rPr>
+              <a:t>How to check if you have it:</a:t>
+            </a:r>
+            <a:endParaRPr sz="1200">
+              <a:solidFill>
+                <a:schemeClr val="dk1"/>
+              </a:solidFill>
+              <a:latin typeface="Calibri"/>
+              <a:ea typeface="Calibri"/>
+              <a:cs typeface="Calibri"/>
+              <a:sym typeface="Calibri"/>
+            </a:endParaRPr>
+          </a:p>
+          <a:p>
+            <a:pPr marL="514350" marR="0" lvl="0" indent="-133350" algn="l" rtl="0">
+              <a:lnSpc>
+                <a:spcPct val="100000"/>
+              </a:lnSpc>
+              <a:spcBef>
+                <a:spcPts val="0"/>
+              </a:spcBef>
+              <a:spcAft>
+                <a:spcPts val="0"/>
+              </a:spcAft>
+              <a:buClr>
+                <a:srgbClr val="3C78D8"/>
+              </a:buClr>
+              <a:buSzPts val="1200"/>
+              <a:buFont typeface="Calibri"/>
+              <a:buChar char="●"/>
+            </a:pPr>
+            <a:r>
+              <a:rPr lang="en" sz="1200" b="1">
+                <a:solidFill>
+                  <a:srgbClr val="3C78D8"/>
+                </a:solidFill>
+                <a:latin typeface="Calibri"/>
+                <a:ea typeface="Calibri"/>
+                <a:cs typeface="Calibri"/>
+                <a:sym typeface="Calibri"/>
+              </a:rPr>
+              <a:t>uv pip show litellm</a:t>
+            </a:r>
+            <a:endParaRPr sz="1200" b="1">
+              <a:solidFill>
+                <a:srgbClr val="3C78D8"/>
+              </a:solidFill>
+              <a:latin typeface="Calibri"/>
+              <a:ea typeface="Calibri"/>
+              <a:cs typeface="Calibri"/>
+              <a:sym typeface="Calibri"/>
+            </a:endParaRPr>
+          </a:p>
+          <a:p>
+            <a:pPr marL="514350" marR="0" lvl="0" indent="-133350" algn="l" rtl="0">
+              <a:lnSpc>
+                <a:spcPct val="100000"/>
+              </a:lnSpc>
+              <a:spcBef>
+                <a:spcPts val="0"/>
+              </a:spcBef>
+              <a:spcAft>
+                <a:spcPts val="0"/>
+              </a:spcAft>
+              <a:buClr>
+                <a:srgbClr val="3C78D8"/>
+              </a:buClr>
+              <a:buSzPts val="1200"/>
+              <a:buFont typeface="Calibri"/>
+              <a:buChar char="●"/>
+            </a:pPr>
+            <a:r>
+              <a:rPr lang="en" sz="1200" b="1">
+                <a:solidFill>
+                  <a:srgbClr val="3C78D8"/>
+                </a:solidFill>
+                <a:latin typeface="Calibri"/>
+                <a:ea typeface="Calibri"/>
+                <a:cs typeface="Calibri"/>
+                <a:sym typeface="Calibri"/>
+              </a:rPr>
+              <a:t>find ~/.cache -name "litellm_init.pth" 2&gt;/dev/null</a:t>
+            </a:r>
+            <a:endParaRPr sz="1200" b="1">
+              <a:solidFill>
+                <a:srgbClr val="3C78D8"/>
+              </a:solidFill>
+              <a:latin typeface="Calibri"/>
+              <a:ea typeface="Calibri"/>
+              <a:cs typeface="Calibri"/>
+              <a:sym typeface="Calibri"/>
+            </a:endParaRPr>
+          </a:p>
+          <a:p>
+            <a:pPr marL="514350" marR="0" lvl="0" indent="-133350" algn="l" rtl="0">
+              <a:lnSpc>
+                <a:spcPct val="100000"/>
+              </a:lnSpc>
+              <a:spcBef>
+                <a:spcPts val="0"/>
+              </a:spcBef>
+              <a:spcAft>
+                <a:spcPts val="0"/>
+              </a:spcAft>
+              <a:buClr>
+                <a:srgbClr val="3C78D8"/>
+              </a:buClr>
+              <a:buSzPts val="1200"/>
+              <a:buFont typeface="Calibri"/>
+              <a:buChar char="●"/>
+            </a:pPr>
+            <a:r>
+              <a:rPr lang="en" sz="1200" b="1">
+                <a:solidFill>
+                  <a:srgbClr val="3C78D8"/>
+                </a:solidFill>
+                <a:latin typeface="Calibri"/>
+                <a:ea typeface="Calibri"/>
+                <a:cs typeface="Calibri"/>
+                <a:sym typeface="Calibri"/>
+              </a:rPr>
+              <a:t>ls ~/.config/sysmon/sysmon.py 2&gt;/dev/null</a:t>
+            </a:r>
+            <a:endParaRPr sz="1200" b="1">
+              <a:solidFill>
+                <a:srgbClr val="3C78D8"/>
+              </a:solidFill>
+              <a:latin typeface="Calibri"/>
+              <a:ea typeface="Calibri"/>
+              <a:cs typeface="Calibri"/>
+              <a:sym typeface="Calibri"/>
+            </a:endParaRPr>
+          </a:p>
+          <a:p>
+            <a:pPr marL="514350" marR="0" lvl="0" indent="-133350" algn="l" rtl="0">
+              <a:lnSpc>
+                <a:spcPct val="100000"/>
+              </a:lnSpc>
+              <a:spcBef>
+                <a:spcPts val="0"/>
+              </a:spcBef>
+              <a:spcAft>
+                <a:spcPts val="0"/>
+              </a:spcAft>
+              <a:buClr>
+                <a:srgbClr val="3C78D8"/>
+              </a:buClr>
+              <a:buSzPts val="1200"/>
+              <a:buFont typeface="Calibri"/>
+              <a:buChar char="●"/>
+            </a:pPr>
+            <a:r>
+              <a:rPr lang="en" sz="1200" b="1">
+                <a:solidFill>
+                  <a:srgbClr val="3C78D8"/>
+                </a:solidFill>
+                <a:latin typeface="Calibri"/>
+                <a:ea typeface="Calibri"/>
+                <a:cs typeface="Calibri"/>
+                <a:sym typeface="Calibri"/>
+              </a:rPr>
+              <a:t>ls ~/.config/systemd/user/sysmon.service 2&gt;/dev/null</a:t>
+            </a:r>
+            <a:endParaRPr sz="1200" b="1">
+              <a:solidFill>
+                <a:srgbClr val="3C78D8"/>
+              </a:solidFill>
+              <a:latin typeface="Calibri"/>
+              <a:ea typeface="Calibri"/>
+              <a:cs typeface="Calibri"/>
+              <a:sym typeface="Calibri"/>
+            </a:endParaRPr>
+          </a:p>
+          <a:p>
+            <a:pPr marL="514350" marR="0" lvl="0" indent="-133350" algn="l" rtl="0">
+              <a:lnSpc>
+                <a:spcPct val="100000"/>
+              </a:lnSpc>
+              <a:spcBef>
+                <a:spcPts val="0"/>
+              </a:spcBef>
+              <a:spcAft>
+                <a:spcPts val="0"/>
+              </a:spcAft>
+              <a:buClr>
+                <a:srgbClr val="3C78D8"/>
+              </a:buClr>
+              <a:buSzPts val="1200"/>
+              <a:buFont typeface="Calibri"/>
+              <a:buChar char="●"/>
+            </a:pPr>
+            <a:r>
+              <a:rPr lang="en" sz="1200" b="1">
+                <a:solidFill>
+                  <a:srgbClr val="3C78D8"/>
+                </a:solidFill>
+                <a:latin typeface="Calibri"/>
+                <a:ea typeface="Calibri"/>
+                <a:cs typeface="Calibri"/>
+                <a:sym typeface="Calibri"/>
+              </a:rPr>
+              <a:t>cat ~/.config/sysmon/sysmon.py 2&gt;/dev/null</a:t>
+            </a:r>
+            <a:endParaRPr sz="1200" b="1">
+              <a:solidFill>
+                <a:srgbClr val="3C78D8"/>
+              </a:solidFill>
+              <a:latin typeface="Calibri"/>
+              <a:ea typeface="Calibri"/>
+              <a:cs typeface="Calibri"/>
+              <a:sym typeface="Calibri"/>
+            </a:endParaRPr>
+          </a:p>
+          <a:p>
+            <a:pPr marL="514350" marR="0" lvl="0" indent="-133350" algn="l" rtl="0">
+              <a:lnSpc>
+                <a:spcPct val="100000"/>
+              </a:lnSpc>
+              <a:spcBef>
+                <a:spcPts val="0"/>
+              </a:spcBef>
+              <a:spcAft>
+                <a:spcPts val="0"/>
+              </a:spcAft>
+              <a:buClr>
+                <a:srgbClr val="3C78D8"/>
+              </a:buClr>
+              <a:buSzPts val="1200"/>
+              <a:buFont typeface="Calibri"/>
+              <a:buChar char="●"/>
+            </a:pPr>
+            <a:r>
+              <a:rPr lang="en" sz="1200" b="1">
+                <a:solidFill>
+                  <a:srgbClr val="3C78D8"/>
+                </a:solidFill>
+                <a:latin typeface="Calibri"/>
+                <a:ea typeface="Calibri"/>
+                <a:cs typeface="Calibri"/>
+                <a:sym typeface="Calibri"/>
+              </a:rPr>
+              <a:t>find ~/.cache/pip ~/.cache/uv -name "litellm*.whl" 2&gt;/dev/null</a:t>
+            </a:r>
+            <a:endParaRPr sz="1200" b="1">
+              <a:solidFill>
+                <a:srgbClr val="3C78D8"/>
+              </a:solidFill>
+              <a:latin typeface="Calibri"/>
+              <a:ea typeface="Calibri"/>
+              <a:cs typeface="Calibri"/>
+              <a:sym typeface="Calibri"/>
+            </a:endParaRPr>
+          </a:p>
+        </p:txBody>
+      </p:sp>
+      <p:pic>
+        <p:nvPicPr>
+          <p:cNvPr id="280" name="Google Shape;280;p39"/>
+          <p:cNvPicPr preferRelativeResize="0"/>
+          <p:nvPr/>
+        </p:nvPicPr>
+        <p:blipFill>
+          <a:blip r:embed="rId3" cstate="email">
+            <a:alphaModFix/>
+            <a:extLst>
+              <a:ext uri="{28A0092B-C50C-407E-A947-70E740481C1C}">
+                <a14:useLocalDpi xmlns:a14="http://schemas.microsoft.com/office/drawing/2010/main"/>
+              </a:ext>
+            </a:extLst>
+          </a:blip>
+          <a:stretch>
+            <a:fillRect/>
+          </a:stretch>
+        </p:blipFill>
+        <p:spPr>
+          <a:xfrm>
+            <a:off x="5236750" y="597688"/>
+            <a:ext cx="3769625" cy="2829028"/>
+          </a:xfrm>
+          <a:prstGeom prst="rect">
+            <a:avLst/>
+          </a:prstGeom>
+          <a:noFill/>
+          <a:ln w="9525" cap="flat" cmpd="sng">
+            <a:solidFill>
+              <a:srgbClr val="FF0000"/>
+            </a:solidFill>
+            <a:prstDash val="solid"/>
+            <a:round/>
+            <a:headEnd type="none" w="sm" len="sm"/>
+            <a:tailEnd type="none" w="sm" len="sm"/>
+          </a:ln>
+        </p:spPr>
+      </p:pic>
+    </p:spTree>
+  </p:cSld>
+  <p:clrMapOvr>
+    <a:masterClrMapping/>
+  </p:clrMapOvr>
+</p:sld>
+</file>
+
+<file path=ppt/slides/slide26.xml><?xml version="1.0" encoding="utf-8"?>
+<p:sld xmlns:a="http://schemas.openxmlformats.org/drawingml/2006/main" xmlns:r="http://schemas.openxmlformats.org/officeDocument/2006/relationships" xmlns:p="http://schemas.openxmlformats.org/presentationml/2006/main">
+  <p:cSld>
+    <p:spTree>
+      <p:nvGrpSpPr>
+        <p:cNvPr id="1" name="Shape 284"/>
+        <p:cNvGrpSpPr/>
+        <p:nvPr/>
+      </p:nvGrpSpPr>
+      <p:grpSpPr>
+        <a:xfrm>
+          <a:off x="0" y="0"/>
+          <a:ext cx="0" cy="0"/>
+          <a:chOff x="0" y="0"/>
+          <a:chExt cx="0" cy="0"/>
+        </a:xfrm>
+      </p:grpSpPr>
+      <p:sp>
+        <p:nvSpPr>
+          <p:cNvPr id="285" name="Google Shape;285;p40"/>
           <p:cNvSpPr txBox="1"/>
           <p:nvPr/>
         </p:nvSpPr>
@@ -41797,7 +42930,7 @@
       </p:sp>
       <p:sp>
         <p:nvSpPr>
-          <p:cNvPr id="273" name="Google Shape;273;p39"/>
+          <p:cNvPr id="286" name="Google Shape;286;p40"/>
           <p:cNvSpPr txBox="1"/>
           <p:nvPr/>
         </p:nvSpPr>
@@ -41925,7 +43058,7 @@
       </p:sp>
       <p:sp>
         <p:nvSpPr>
-          <p:cNvPr id="274" name="Google Shape;274;p39"/>
+          <p:cNvPr id="287" name="Google Shape;287;p40"/>
           <p:cNvSpPr txBox="1"/>
           <p:nvPr/>
         </p:nvSpPr>
@@ -42195,7 +43328,7 @@
       </p:sp>
       <p:sp>
         <p:nvSpPr>
-          <p:cNvPr id="275" name="Google Shape;275;p39"/>
+          <p:cNvPr id="288" name="Google Shape;288;p40"/>
           <p:cNvSpPr txBox="1"/>
           <p:nvPr/>
         </p:nvSpPr>
@@ -42456,7 +43589,7 @@
       </p:sp>
       <p:pic>
         <p:nvPicPr>
-          <p:cNvPr id="276" name="Google Shape;276;p39"/>
+          <p:cNvPr id="289" name="Google Shape;289;p40"/>
           <p:cNvPicPr preferRelativeResize="0"/>
           <p:nvPr/>
         </p:nvPicPr>
@@ -42495,7 +43628,7 @@
       </p:pic>
       <p:pic>
         <p:nvPicPr>
-          <p:cNvPr id="277" name="Google Shape;277;p39"/>
+          <p:cNvPr id="290" name="Google Shape;290;p40"/>
           <p:cNvPicPr preferRelativeResize="0"/>
           <p:nvPr/>
         </p:nvPicPr>
@@ -42540,12 +43673,12 @@
 </p:sld>
 </file>
 
-<file path=ppt/slides/slide26.xml><?xml version="1.0" encoding="utf-8"?>
+<file path=ppt/slides/slide27.xml><?xml version="1.0" encoding="utf-8"?>
 <p:sld xmlns:a="http://schemas.openxmlformats.org/drawingml/2006/main" xmlns:r="http://schemas.openxmlformats.org/officeDocument/2006/relationships" xmlns:p="http://schemas.openxmlformats.org/presentationml/2006/main">
   <p:cSld>
     <p:spTree>
       <p:nvGrpSpPr>
-        <p:cNvPr id="1" name="Shape 281"/>
+        <p:cNvPr id="1" name="Shape 294"/>
         <p:cNvGrpSpPr/>
         <p:nvPr/>
       </p:nvGrpSpPr>
@@ -42559,7 +43692,7 @@
       </p:grpSpPr>
       <p:sp>
         <p:nvSpPr>
-          <p:cNvPr id="282" name="Google Shape;282;p40"/>
+          <p:cNvPr id="295" name="Google Shape;295;p41"/>
           <p:cNvSpPr txBox="1"/>
           <p:nvPr/>
         </p:nvSpPr>
@@ -42625,7 +43758,7 @@
       </p:sp>
       <p:sp>
         <p:nvSpPr>
-          <p:cNvPr id="283" name="Google Shape;283;p40"/>
+          <p:cNvPr id="296" name="Google Shape;296;p41"/>
           <p:cNvSpPr txBox="1"/>
           <p:nvPr/>
         </p:nvSpPr>
@@ -42699,7 +43832,7 @@
       </p:sp>
       <p:sp>
         <p:nvSpPr>
-          <p:cNvPr id="284" name="Google Shape;284;p40"/>
+          <p:cNvPr id="297" name="Google Shape;297;p41"/>
           <p:cNvSpPr txBox="1"/>
           <p:nvPr/>
         </p:nvSpPr>
@@ -42773,7 +43906,7 @@
       </p:sp>
       <p:pic>
         <p:nvPicPr>
-          <p:cNvPr id="285" name="Google Shape;285;p40"/>
+          <p:cNvPr id="298" name="Google Shape;298;p41"/>
           <p:cNvPicPr preferRelativeResize="0"/>
           <p:nvPr/>
         </p:nvPicPr>
@@ -42812,7 +43945,7 @@
       </p:pic>
       <p:sp>
         <p:nvSpPr>
-          <p:cNvPr id="286" name="Google Shape;286;p40"/>
+          <p:cNvPr id="299" name="Google Shape;299;p41"/>
           <p:cNvSpPr txBox="1"/>
           <p:nvPr/>
         </p:nvSpPr>
@@ -42859,7 +43992,7 @@
       </p:sp>
       <p:pic>
         <p:nvPicPr>
-          <p:cNvPr id="287" name="Google Shape;287;p40"/>
+          <p:cNvPr id="300" name="Google Shape;300;p41"/>
           <p:cNvPicPr preferRelativeResize="0"/>
           <p:nvPr/>
         </p:nvPicPr>
@@ -42904,12 +44037,12 @@
 </p:sld>
 </file>
 
-<file path=ppt/slides/slide27.xml><?xml version="1.0" encoding="utf-8"?>
+<file path=ppt/slides/slide28.xml><?xml version="1.0" encoding="utf-8"?>
 <p:sld xmlns:a="http://schemas.openxmlformats.org/drawingml/2006/main" xmlns:r="http://schemas.openxmlformats.org/officeDocument/2006/relationships" xmlns:p="http://schemas.openxmlformats.org/presentationml/2006/main">
   <p:cSld>
     <p:spTree>
       <p:nvGrpSpPr>
-        <p:cNvPr id="1" name="Shape 291"/>
+        <p:cNvPr id="1" name="Shape 304"/>
         <p:cNvGrpSpPr/>
         <p:nvPr/>
       </p:nvGrpSpPr>
@@ -42923,7 +44056,7 @@
       </p:grpSpPr>
       <p:pic>
         <p:nvPicPr>
-          <p:cNvPr id="292" name="Google Shape;292;p41"/>
+          <p:cNvPr id="305" name="Google Shape;305;p42"/>
           <p:cNvPicPr preferRelativeResize="0"/>
           <p:nvPr/>
         </p:nvPicPr>
@@ -42955,7 +44088,7 @@
       </p:pic>
       <p:sp>
         <p:nvSpPr>
-          <p:cNvPr id="293" name="Google Shape;293;p41"/>
+          <p:cNvPr id="306" name="Google Shape;306;p42"/>
           <p:cNvSpPr txBox="1"/>
           <p:nvPr/>
         </p:nvSpPr>
@@ -43021,7 +44154,7 @@
       </p:sp>
       <p:sp>
         <p:nvSpPr>
-          <p:cNvPr id="294" name="Google Shape;294;p41"/>
+          <p:cNvPr id="307" name="Google Shape;307;p42"/>
           <p:cNvSpPr txBox="1"/>
           <p:nvPr/>
         </p:nvSpPr>
@@ -43451,7 +44584,7 @@
       </p:sp>
       <p:pic>
         <p:nvPicPr>
-          <p:cNvPr id="295" name="Google Shape;295;p41"/>
+          <p:cNvPr id="308" name="Google Shape;308;p42"/>
           <p:cNvPicPr preferRelativeResize="0"/>
           <p:nvPr/>
         </p:nvPicPr>
@@ -43483,7 +44616,7 @@
       </p:pic>
       <p:sp>
         <p:nvSpPr>
-          <p:cNvPr id="296" name="Google Shape;296;p41"/>
+          <p:cNvPr id="309" name="Google Shape;309;p42"/>
           <p:cNvSpPr txBox="1"/>
           <p:nvPr/>
         </p:nvSpPr>
@@ -43562,7 +44695,7 @@
       </p:sp>
       <p:sp>
         <p:nvSpPr>
-          <p:cNvPr id="297" name="Google Shape;297;p41"/>
+          <p:cNvPr id="310" name="Google Shape;310;p42"/>
           <p:cNvSpPr txBox="1"/>
           <p:nvPr/>
         </p:nvSpPr>
@@ -43634,12 +44767,12 @@
 </p:sld>
 </file>
 
-<file path=ppt/slides/slide28.xml><?xml version="1.0" encoding="utf-8"?>
+<file path=ppt/slides/slide29.xml><?xml version="1.0" encoding="utf-8"?>
 <p:sld xmlns:a="http://schemas.openxmlformats.org/drawingml/2006/main" xmlns:r="http://schemas.openxmlformats.org/officeDocument/2006/relationships" xmlns:p="http://schemas.openxmlformats.org/presentationml/2006/main">
   <p:cSld>
     <p:spTree>
       <p:nvGrpSpPr>
-        <p:cNvPr id="1" name="Shape 301"/>
+        <p:cNvPr id="1" name="Shape 314"/>
         <p:cNvGrpSpPr/>
         <p:nvPr/>
       </p:nvGrpSpPr>
@@ -43653,7 +44786,7 @@
       </p:grpSpPr>
       <p:sp>
         <p:nvSpPr>
-          <p:cNvPr id="302" name="Google Shape;302;p42"/>
+          <p:cNvPr id="315" name="Google Shape;315;p43"/>
           <p:cNvSpPr txBox="1"/>
           <p:nvPr/>
         </p:nvSpPr>
@@ -45261,7 +46394,7 @@
         </p:nvSpPr>
         <p:spPr>
           <a:xfrm>
-            <a:off x="100600" y="2550357"/>
+            <a:off x="100600" y="2272907"/>
             <a:ext cx="4392600" cy="2235000"/>
           </a:xfrm>
           <a:prstGeom prst="rect">
@@ -45443,7 +46576,7 @@
         </p:nvSpPr>
         <p:spPr>
           <a:xfrm>
-            <a:off x="4577350" y="2603273"/>
+            <a:off x="4680650" y="2071198"/>
             <a:ext cx="4392600" cy="1680900"/>
           </a:xfrm>
           <a:prstGeom prst="rect">
@@ -45652,7 +46785,7 @@
         </p:nvSpPr>
         <p:spPr>
           <a:xfrm>
-            <a:off x="4577350" y="4397450"/>
+            <a:off x="100600" y="4631975"/>
             <a:ext cx="4392600" cy="387900"/>
           </a:xfrm>
           <a:prstGeom prst="rect">
@@ -45764,6 +46897,244 @@
           </a:p>
         </p:txBody>
       </p:sp>
+      <p:sp>
+        <p:nvSpPr>
+          <p:cNvPr id="108" name="Google Shape;108;p19"/>
+          <p:cNvSpPr txBox="1"/>
+          <p:nvPr/>
+        </p:nvSpPr>
+        <p:spPr>
+          <a:xfrm>
+            <a:off x="4680650" y="3907698"/>
+            <a:ext cx="4392600" cy="942000"/>
+          </a:xfrm>
+          <a:prstGeom prst="rect">
+            <a:avLst/>
+          </a:prstGeom>
+          <a:solidFill>
+            <a:srgbClr val="FFF2CC"/>
+          </a:solidFill>
+          <a:ln w="9525" cap="flat" cmpd="sng">
+            <a:solidFill>
+              <a:srgbClr val="FF0000"/>
+            </a:solidFill>
+            <a:prstDash val="solid"/>
+            <a:round/>
+            <a:headEnd type="none" w="sm" len="sm"/>
+            <a:tailEnd type="none" w="sm" len="sm"/>
+          </a:ln>
+        </p:spPr>
+        <p:txBody>
+          <a:bodyPr spcFirstLastPara="1" wrap="square" lIns="9125" tIns="9125" rIns="9125" bIns="9125" anchor="t" anchorCtr="0">
+            <a:spAutoFit/>
+          </a:bodyPr>
+          <a:lstStyle/>
+          <a:p>
+            <a:pPr marL="171450" marR="0" lvl="0" indent="-133350" algn="l" rtl="0">
+              <a:lnSpc>
+                <a:spcPct val="100000"/>
+              </a:lnSpc>
+              <a:spcBef>
+                <a:spcPts val="0"/>
+              </a:spcBef>
+              <a:spcAft>
+                <a:spcPts val="0"/>
+              </a:spcAft>
+              <a:buClr>
+                <a:srgbClr val="FF0000"/>
+              </a:buClr>
+              <a:buSzPts val="1200"/>
+              <a:buFont typeface="Calibri"/>
+              <a:buChar char="●"/>
+            </a:pPr>
+            <a:r>
+              <a:rPr lang="en" sz="1200" b="1">
+                <a:solidFill>
+                  <a:srgbClr val="FF0000"/>
+                </a:solidFill>
+                <a:latin typeface="Calibri"/>
+                <a:ea typeface="Calibri"/>
+                <a:cs typeface="Calibri"/>
+                <a:sym typeface="Calibri"/>
+              </a:rPr>
+              <a:t>3 Claude Code Hacks:</a:t>
+            </a:r>
+            <a:endParaRPr sz="1200" b="1">
+              <a:solidFill>
+                <a:srgbClr val="FF0000"/>
+              </a:solidFill>
+              <a:latin typeface="Calibri"/>
+              <a:ea typeface="Calibri"/>
+              <a:cs typeface="Calibri"/>
+              <a:sym typeface="Calibri"/>
+            </a:endParaRPr>
+          </a:p>
+          <a:p>
+            <a:pPr marL="171450" marR="0" lvl="0" indent="-133350" algn="l" rtl="0">
+              <a:lnSpc>
+                <a:spcPct val="100000"/>
+              </a:lnSpc>
+              <a:spcBef>
+                <a:spcPts val="0"/>
+              </a:spcBef>
+              <a:spcAft>
+                <a:spcPts val="0"/>
+              </a:spcAft>
+              <a:buSzPts val="1200"/>
+              <a:buFont typeface="Calibri"/>
+              <a:buChar char="●"/>
+            </a:pPr>
+            <a:r>
+              <a:rPr lang="en" sz="1200" u="sng">
+                <a:solidFill>
+                  <a:schemeClr val="hlink"/>
+                </a:solidFill>
+                <a:latin typeface="Calibri"/>
+                <a:ea typeface="Calibri"/>
+                <a:cs typeface="Calibri"/>
+                <a:sym typeface="Calibri"/>
+                <a:hlinkClick r:id="rId5"/>
+              </a:rPr>
+              <a:t>https://www.youtube.com/shorts/tQuinn9FpMA</a:t>
+            </a:r>
+            <a:endParaRPr sz="1200">
+              <a:latin typeface="Calibri"/>
+              <a:ea typeface="Calibri"/>
+              <a:cs typeface="Calibri"/>
+              <a:sym typeface="Calibri"/>
+            </a:endParaRPr>
+          </a:p>
+          <a:p>
+            <a:pPr marL="171450" marR="0" lvl="0" indent="-133350" algn="l" rtl="0">
+              <a:lnSpc>
+                <a:spcPct val="100000"/>
+              </a:lnSpc>
+              <a:spcBef>
+                <a:spcPts val="0"/>
+              </a:spcBef>
+              <a:spcAft>
+                <a:spcPts val="0"/>
+              </a:spcAft>
+              <a:buSzPts val="1200"/>
+              <a:buFont typeface="Calibri"/>
+              <a:buChar char="●"/>
+            </a:pPr>
+            <a:r>
+              <a:rPr lang="en" sz="1200" b="1">
+                <a:solidFill>
+                  <a:srgbClr val="FF0000"/>
+                </a:solidFill>
+                <a:latin typeface="Calibri"/>
+                <a:ea typeface="Calibri"/>
+                <a:cs typeface="Calibri"/>
+                <a:sym typeface="Calibri"/>
+              </a:rPr>
+              <a:t>/hook</a:t>
+            </a:r>
+            <a:r>
+              <a:rPr lang="en" sz="1200">
+                <a:latin typeface="Calibri"/>
+                <a:ea typeface="Calibri"/>
+                <a:cs typeface="Calibri"/>
+                <a:sym typeface="Calibri"/>
+              </a:rPr>
+              <a:t> I want you to create a sound when you finish a task</a:t>
+            </a:r>
+            <a:endParaRPr sz="1200">
+              <a:latin typeface="Calibri"/>
+              <a:ea typeface="Calibri"/>
+              <a:cs typeface="Calibri"/>
+              <a:sym typeface="Calibri"/>
+            </a:endParaRPr>
+          </a:p>
+          <a:p>
+            <a:pPr marL="171450" marR="0" lvl="0" indent="-133350" algn="l" rtl="0">
+              <a:lnSpc>
+                <a:spcPct val="100000"/>
+              </a:lnSpc>
+              <a:spcBef>
+                <a:spcPts val="0"/>
+              </a:spcBef>
+              <a:spcAft>
+                <a:spcPts val="0"/>
+              </a:spcAft>
+              <a:buSzPts val="1200"/>
+              <a:buFont typeface="Calibri"/>
+              <a:buChar char="●"/>
+            </a:pPr>
+            <a:r>
+              <a:rPr lang="en" sz="1200" b="1">
+                <a:solidFill>
+                  <a:srgbClr val="FF0000"/>
+                </a:solidFill>
+                <a:latin typeface="Calibri"/>
+                <a:ea typeface="Calibri"/>
+                <a:cs typeface="Calibri"/>
+                <a:sym typeface="Calibri"/>
+              </a:rPr>
+              <a:t>/statusline</a:t>
+            </a:r>
+            <a:r>
+              <a:rPr lang="en" sz="1200">
+                <a:latin typeface="Calibri"/>
+                <a:ea typeface="Calibri"/>
+                <a:cs typeface="Calibri"/>
+                <a:sym typeface="Calibri"/>
+              </a:rPr>
+              <a:t> create status line to include ...</a:t>
+            </a:r>
+            <a:endParaRPr sz="1200">
+              <a:latin typeface="Calibri"/>
+              <a:ea typeface="Calibri"/>
+              <a:cs typeface="Calibri"/>
+              <a:sym typeface="Calibri"/>
+            </a:endParaRPr>
+          </a:p>
+          <a:p>
+            <a:pPr marL="171450" marR="0" lvl="0" indent="-133350" algn="l" rtl="0">
+              <a:lnSpc>
+                <a:spcPct val="100000"/>
+              </a:lnSpc>
+              <a:spcBef>
+                <a:spcPts val="0"/>
+              </a:spcBef>
+              <a:spcAft>
+                <a:spcPts val="0"/>
+              </a:spcAft>
+              <a:buSzPts val="1200"/>
+              <a:buFont typeface="Calibri"/>
+              <a:buChar char="●"/>
+            </a:pPr>
+            <a:r>
+              <a:rPr lang="en" sz="1200" b="1">
+                <a:solidFill>
+                  <a:srgbClr val="FF0000"/>
+                </a:solidFill>
+                <a:latin typeface="Calibri"/>
+                <a:ea typeface="Calibri"/>
+                <a:cs typeface="Calibri"/>
+                <a:sym typeface="Calibri"/>
+              </a:rPr>
+              <a:t>/skill-creator</a:t>
+            </a:r>
+            <a:r>
+              <a:rPr lang="en" sz="1200">
+                <a:latin typeface="Calibri"/>
+                <a:ea typeface="Calibri"/>
+                <a:cs typeface="Calibri"/>
+                <a:sym typeface="Calibri"/>
+              </a:rPr>
+              <a:t> create a skill that humanizes AI-generated text</a:t>
+            </a:r>
+            <a:endParaRPr sz="1200">
+              <a:latin typeface="Calibri"/>
+              <a:ea typeface="Calibri"/>
+              <a:cs typeface="Calibri"/>
+              <a:sym typeface="Calibri"/>
+            </a:endParaRPr>
+          </a:p>
+        </p:txBody>
+      </p:sp>
     </p:spTree>
   </p:cSld>
   <p:clrMapOvr>
@@ -45777,7 +47148,7 @@
   <p:cSld>
     <p:spTree>
       <p:nvGrpSpPr>
-        <p:cNvPr id="1" name="Shape 111"/>
+        <p:cNvPr id="1" name="Shape 112"/>
         <p:cNvGrpSpPr/>
         <p:nvPr/>
       </p:nvGrpSpPr>
@@ -45791,7 +47162,7 @@
       </p:grpSpPr>
       <p:sp>
         <p:nvSpPr>
-          <p:cNvPr id="112" name="Google Shape;112;p20"/>
+          <p:cNvPr id="113" name="Google Shape;113;p20"/>
           <p:cNvSpPr txBox="1"/>
           <p:nvPr/>
         </p:nvSpPr>
@@ -45857,7 +47228,7 @@
       </p:sp>
       <p:sp>
         <p:nvSpPr>
-          <p:cNvPr id="113" name="Google Shape;113;p20"/>
+          <p:cNvPr id="114" name="Google Shape;114;p20"/>
           <p:cNvSpPr txBox="1"/>
           <p:nvPr/>
         </p:nvSpPr>
@@ -46236,7 +47607,7 @@
       </p:sp>
       <p:pic>
         <p:nvPicPr>
-          <p:cNvPr id="114" name="Google Shape;114;p20"/>
+          <p:cNvPr id="115" name="Google Shape;115;p20"/>
           <p:cNvPicPr preferRelativeResize="0"/>
           <p:nvPr/>
         </p:nvPicPr>
@@ -46274,7 +47645,7 @@
       </p:pic>
       <p:sp>
         <p:nvSpPr>
-          <p:cNvPr id="115" name="Google Shape;115;p20"/>
+          <p:cNvPr id="116" name="Google Shape;116;p20"/>
           <p:cNvSpPr txBox="1"/>
           <p:nvPr/>
         </p:nvSpPr>
@@ -46340,7 +47711,7 @@
       </p:sp>
       <p:sp>
         <p:nvSpPr>
-          <p:cNvPr id="116" name="Google Shape;116;p20"/>
+          <p:cNvPr id="117" name="Google Shape;117;p20"/>
           <p:cNvSpPr txBox="1"/>
           <p:nvPr/>
         </p:nvSpPr>
@@ -46652,7 +48023,7 @@
   <p:cSld>
     <p:spTree>
       <p:nvGrpSpPr>
-        <p:cNvPr id="1" name="Shape 120"/>
+        <p:cNvPr id="1" name="Shape 121"/>
         <p:cNvGrpSpPr/>
         <p:nvPr/>
       </p:nvGrpSpPr>
@@ -46666,7 +48037,7 @@
       </p:grpSpPr>
       <p:sp>
         <p:nvSpPr>
-          <p:cNvPr id="121" name="Google Shape;121;p21"/>
+          <p:cNvPr id="122" name="Google Shape;122;p21"/>
           <p:cNvSpPr txBox="1"/>
           <p:nvPr/>
         </p:nvSpPr>
@@ -47003,7 +48374,7 @@
       </p:sp>
       <p:pic>
         <p:nvPicPr>
-          <p:cNvPr id="122" name="Google Shape;122;p21"/>
+          <p:cNvPr id="123" name="Google Shape;123;p21"/>
           <p:cNvPicPr preferRelativeResize="0"/>
           <p:nvPr/>
         </p:nvPicPr>
@@ -47053,7 +48424,7 @@
   <p:cSld>
     <p:spTree>
       <p:nvGrpSpPr>
-        <p:cNvPr id="1" name="Shape 126"/>
+        <p:cNvPr id="1" name="Shape 127"/>
         <p:cNvGrpSpPr/>
         <p:nvPr/>
       </p:nvGrpSpPr>
@@ -47067,7 +48438,7 @@
       </p:grpSpPr>
       <p:sp>
         <p:nvSpPr>
-          <p:cNvPr id="127" name="Google Shape;127;p22"/>
+          <p:cNvPr id="128" name="Google Shape;128;p22"/>
           <p:cNvSpPr txBox="1"/>
           <p:nvPr/>
         </p:nvSpPr>
@@ -47133,7 +48504,7 @@
       </p:sp>
       <p:sp>
         <p:nvSpPr>
-          <p:cNvPr id="128" name="Google Shape;128;p22"/>
+          <p:cNvPr id="129" name="Google Shape;129;p22"/>
           <p:cNvSpPr txBox="1"/>
           <p:nvPr/>
         </p:nvSpPr>
@@ -47291,7 +48662,7 @@
       </p:sp>
       <p:pic>
         <p:nvPicPr>
-          <p:cNvPr id="129" name="Google Shape;129;p22"/>
+          <p:cNvPr id="130" name="Google Shape;130;p22"/>
           <p:cNvPicPr preferRelativeResize="0"/>
           <p:nvPr/>
         </p:nvPicPr>
@@ -47323,6 +48694,253 @@
           </a:ln>
         </p:spPr>
       </p:pic>
+      <p:sp>
+        <p:nvSpPr>
+          <p:cNvPr id="131" name="Google Shape;131;p22"/>
+          <p:cNvSpPr txBox="1"/>
+          <p:nvPr/>
+        </p:nvSpPr>
+        <p:spPr>
+          <a:xfrm>
+            <a:off x="100600" y="3015357"/>
+            <a:ext cx="4392600" cy="2050200"/>
+          </a:xfrm>
+          <a:prstGeom prst="rect">
+            <a:avLst/>
+          </a:prstGeom>
+          <a:solidFill>
+            <a:srgbClr val="FFF2CC"/>
+          </a:solidFill>
+          <a:ln w="9525" cap="flat" cmpd="sng">
+            <a:solidFill>
+              <a:srgbClr val="FF0000"/>
+            </a:solidFill>
+            <a:prstDash val="solid"/>
+            <a:round/>
+            <a:headEnd type="none" w="sm" len="sm"/>
+            <a:tailEnd type="none" w="sm" len="sm"/>
+          </a:ln>
+        </p:spPr>
+        <p:txBody>
+          <a:bodyPr spcFirstLastPara="1" wrap="square" lIns="9125" tIns="9125" rIns="9125" bIns="9125" anchor="t" anchorCtr="0">
+            <a:spAutoFit/>
+          </a:bodyPr>
+          <a:lstStyle/>
+          <a:p>
+            <a:pPr marL="171450" marR="0" lvl="0" indent="-133350" algn="l" rtl="0">
+              <a:lnSpc>
+                <a:spcPct val="100000"/>
+              </a:lnSpc>
+              <a:spcBef>
+                <a:spcPts val="0"/>
+              </a:spcBef>
+              <a:spcAft>
+                <a:spcPts val="0"/>
+              </a:spcAft>
+              <a:buSzPts val="1200"/>
+              <a:buFont typeface="Calibri"/>
+              <a:buChar char="●"/>
+            </a:pPr>
+            <a:r>
+              <a:rPr lang="en" sz="1200" b="1">
+                <a:solidFill>
+                  <a:srgbClr val="FF0000"/>
+                </a:solidFill>
+                <a:latin typeface="Calibri"/>
+                <a:ea typeface="Calibri"/>
+                <a:cs typeface="Calibri"/>
+                <a:sym typeface="Calibri"/>
+              </a:rPr>
+              <a:t>Claude Mythos - Anthropic's most powerful AI model yet,</a:t>
+            </a:r>
+            <a:r>
+              <a:rPr lang="en" sz="1200">
+                <a:latin typeface="Calibri"/>
+                <a:ea typeface="Calibri"/>
+                <a:cs typeface="Calibri"/>
+                <a:sym typeface="Calibri"/>
+              </a:rPr>
+              <a:t> accidentally leaked on March 26, 2026 due to a misconfigured data cache</a:t>
+            </a:r>
+            <a:endParaRPr sz="1200">
+              <a:latin typeface="Calibri"/>
+              <a:ea typeface="Calibri"/>
+              <a:cs typeface="Calibri"/>
+              <a:sym typeface="Calibri"/>
+            </a:endParaRPr>
+          </a:p>
+          <a:p>
+            <a:pPr marL="171450" marR="0" lvl="0" indent="-133350" algn="l" rtl="0">
+              <a:lnSpc>
+                <a:spcPct val="100000"/>
+              </a:lnSpc>
+              <a:spcBef>
+                <a:spcPts val="0"/>
+              </a:spcBef>
+              <a:spcAft>
+                <a:spcPts val="0"/>
+              </a:spcAft>
+              <a:buSzPts val="1200"/>
+              <a:buFont typeface="Calibri"/>
+              <a:buChar char="●"/>
+            </a:pPr>
+            <a:r>
+              <a:rPr lang="en" sz="1200">
+                <a:latin typeface="Calibri"/>
+                <a:ea typeface="Calibri"/>
+                <a:cs typeface="Calibri"/>
+                <a:sym typeface="Calibri"/>
+              </a:rPr>
+              <a:t>It introduces a new top-tier model tier called Capybara, surpassing Opus</a:t>
+            </a:r>
+            <a:endParaRPr sz="1200">
+              <a:latin typeface="Calibri"/>
+              <a:ea typeface="Calibri"/>
+              <a:cs typeface="Calibri"/>
+              <a:sym typeface="Calibri"/>
+            </a:endParaRPr>
+          </a:p>
+          <a:p>
+            <a:pPr marL="171450" marR="0" lvl="0" indent="-133350" algn="l" rtl="0">
+              <a:lnSpc>
+                <a:spcPct val="100000"/>
+              </a:lnSpc>
+              <a:spcBef>
+                <a:spcPts val="0"/>
+              </a:spcBef>
+              <a:spcAft>
+                <a:spcPts val="0"/>
+              </a:spcAft>
+              <a:buSzPts val="1200"/>
+              <a:buFont typeface="Calibri"/>
+              <a:buChar char="●"/>
+            </a:pPr>
+            <a:r>
+              <a:rPr lang="en" sz="1200">
+                <a:latin typeface="Calibri"/>
+                <a:ea typeface="Calibri"/>
+                <a:cs typeface="Calibri"/>
+                <a:sym typeface="Calibri"/>
+              </a:rPr>
+              <a:t>It dramatically outperforms previous Claude models in coding, reasoning, and cybersecurity benchmarks</a:t>
+            </a:r>
+            <a:endParaRPr sz="1200">
+              <a:latin typeface="Calibri"/>
+              <a:ea typeface="Calibri"/>
+              <a:cs typeface="Calibri"/>
+              <a:sym typeface="Calibri"/>
+            </a:endParaRPr>
+          </a:p>
+          <a:p>
+            <a:pPr marL="171450" marR="0" lvl="0" indent="-133350" algn="l" rtl="0">
+              <a:lnSpc>
+                <a:spcPct val="100000"/>
+              </a:lnSpc>
+              <a:spcBef>
+                <a:spcPts val="0"/>
+              </a:spcBef>
+              <a:spcAft>
+                <a:spcPts val="0"/>
+              </a:spcAft>
+              <a:buSzPts val="1200"/>
+              <a:buFont typeface="Calibri"/>
+              <a:buChar char="●"/>
+            </a:pPr>
+            <a:r>
+              <a:rPr lang="en" sz="1200">
+                <a:latin typeface="Calibri"/>
+                <a:ea typeface="Calibri"/>
+                <a:cs typeface="Calibri"/>
+                <a:sym typeface="Calibri"/>
+              </a:rPr>
+              <a:t>It's currently in limited early access, restricted to cyber defense organizations, with no public release date announced</a:t>
+            </a:r>
+            <a:endParaRPr sz="1200">
+              <a:latin typeface="Calibri"/>
+              <a:ea typeface="Calibri"/>
+              <a:cs typeface="Calibri"/>
+              <a:sym typeface="Calibri"/>
+            </a:endParaRPr>
+          </a:p>
+          <a:p>
+            <a:pPr marL="171450" marR="0" lvl="0" indent="-133350" algn="l" rtl="0">
+              <a:lnSpc>
+                <a:spcPct val="100000"/>
+              </a:lnSpc>
+              <a:spcBef>
+                <a:spcPts val="0"/>
+              </a:spcBef>
+              <a:spcAft>
+                <a:spcPts val="0"/>
+              </a:spcAft>
+              <a:buSzPts val="1200"/>
+              <a:buFont typeface="Calibri"/>
+              <a:buChar char="●"/>
+            </a:pPr>
+            <a:r>
+              <a:rPr lang="en" sz="1200" u="sng">
+                <a:solidFill>
+                  <a:schemeClr val="hlink"/>
+                </a:solidFill>
+                <a:latin typeface="Calibri"/>
+                <a:ea typeface="Calibri"/>
+                <a:cs typeface="Calibri"/>
+                <a:sym typeface="Calibri"/>
+                <a:hlinkClick r:id="rId4"/>
+              </a:rPr>
+              <a:t>https://fortune.com/2026/03/27/anthropic-data-leak-reveals-powerful-secret-mythos-ai-model/</a:t>
+            </a:r>
+            <a:r>
+              <a:rPr lang="en" sz="1200">
+                <a:latin typeface="Calibri"/>
+                <a:ea typeface="Calibri"/>
+                <a:cs typeface="Calibri"/>
+                <a:sym typeface="Calibri"/>
+              </a:rPr>
+              <a:t> </a:t>
+            </a:r>
+            <a:endParaRPr sz="1200">
+              <a:latin typeface="Calibri"/>
+              <a:ea typeface="Calibri"/>
+              <a:cs typeface="Calibri"/>
+              <a:sym typeface="Calibri"/>
+            </a:endParaRPr>
+          </a:p>
+        </p:txBody>
+      </p:sp>
+      <p:pic>
+        <p:nvPicPr>
+          <p:cNvPr id="132" name="Google Shape;132;p22"/>
+          <p:cNvPicPr preferRelativeResize="0"/>
+          <p:nvPr/>
+        </p:nvPicPr>
+        <p:blipFill>
+          <a:blip r:embed="rId5" cstate="email">
+            <a:alphaModFix/>
+            <a:extLst>
+              <a:ext uri="{28A0092B-C50C-407E-A947-70E740481C1C}">
+                <a14:useLocalDpi xmlns:a14="http://schemas.microsoft.com/office/drawing/2010/main"/>
+              </a:ext>
+            </a:extLst>
+          </a:blip>
+          <a:stretch>
+            <a:fillRect/>
+          </a:stretch>
+        </p:blipFill>
+        <p:spPr>
+          <a:xfrm>
+            <a:off x="4623950" y="3440700"/>
+            <a:ext cx="3061750" cy="1025775"/>
+          </a:xfrm>
+          <a:prstGeom prst="rect">
+            <a:avLst/>
+          </a:prstGeom>
+          <a:noFill/>
+          <a:ln>
+            <a:noFill/>
+          </a:ln>
+        </p:spPr>
+      </p:pic>
     </p:spTree>
   </p:cSld>
   <p:clrMapOvr>
@@ -47336,7 +48954,7 @@
   <p:cSld>
     <p:spTree>
       <p:nvGrpSpPr>
-        <p:cNvPr id="1" name="Shape 133"/>
+        <p:cNvPr id="1" name="Shape 136"/>
         <p:cNvGrpSpPr/>
         <p:nvPr/>
       </p:nvGrpSpPr>
@@ -47350,7 +48968,7 @@
       </p:grpSpPr>
       <p:sp>
         <p:nvSpPr>
-          <p:cNvPr id="134" name="Google Shape;134;p23"/>
+          <p:cNvPr id="137" name="Google Shape;137;p23"/>
           <p:cNvSpPr txBox="1"/>
           <p:nvPr/>
         </p:nvSpPr>
@@ -47416,7 +49034,7 @@
       </p:sp>
       <p:sp>
         <p:nvSpPr>
-          <p:cNvPr id="135" name="Google Shape;135;p23"/>
+          <p:cNvPr id="138" name="Google Shape;138;p23"/>
           <p:cNvSpPr txBox="1"/>
           <p:nvPr/>
         </p:nvSpPr>
@@ -47808,7 +49426,7 @@
       </p:sp>
       <p:pic>
         <p:nvPicPr>
-          <p:cNvPr id="136" name="Google Shape;136;p23"/>
+          <p:cNvPr id="139" name="Google Shape;139;p23"/>
           <p:cNvPicPr preferRelativeResize="0"/>
           <p:nvPr/>
         </p:nvPicPr>
@@ -47827,7 +49445,7 @@
         </p:blipFill>
         <p:spPr>
           <a:xfrm>
-            <a:off x="4659325" y="722104"/>
+            <a:off x="4733225" y="63654"/>
             <a:ext cx="1961025" cy="250150"/>
           </a:xfrm>
           <a:prstGeom prst="rect">
@@ -47841,7 +49459,7 @@
       </p:pic>
       <p:pic>
         <p:nvPicPr>
-          <p:cNvPr id="137" name="Google Shape;137;p23"/>
+          <p:cNvPr id="140" name="Google Shape;140;p23"/>
           <p:cNvPicPr preferRelativeResize="0"/>
           <p:nvPr/>
         </p:nvPicPr>
@@ -47860,18 +49478,282 @@
         </p:blipFill>
         <p:spPr>
           <a:xfrm>
-            <a:off x="4645600" y="1124654"/>
-            <a:ext cx="4345998" cy="3509894"/>
+            <a:off x="4719500" y="466201"/>
+            <a:ext cx="2700149" cy="2180675"/>
           </a:xfrm>
           <a:prstGeom prst="rect">
             <a:avLst/>
           </a:prstGeom>
           <a:noFill/>
-          <a:ln>
-            <a:noFill/>
+          <a:ln w="9525" cap="flat" cmpd="sng">
+            <a:solidFill>
+              <a:srgbClr val="FF0000"/>
+            </a:solidFill>
+            <a:prstDash val="solid"/>
+            <a:round/>
+            <a:headEnd type="none" w="sm" len="sm"/>
+            <a:tailEnd type="none" w="sm" len="sm"/>
           </a:ln>
         </p:spPr>
       </p:pic>
+      <p:sp>
+        <p:nvSpPr>
+          <p:cNvPr id="141" name="Google Shape;141;p23"/>
+          <p:cNvSpPr txBox="1"/>
+          <p:nvPr/>
+        </p:nvSpPr>
+        <p:spPr>
+          <a:xfrm>
+            <a:off x="100600" y="3153407"/>
+            <a:ext cx="4392600" cy="1311300"/>
+          </a:xfrm>
+          <a:prstGeom prst="rect">
+            <a:avLst/>
+          </a:prstGeom>
+          <a:solidFill>
+            <a:srgbClr val="FFF2CC"/>
+          </a:solidFill>
+          <a:ln w="9525" cap="flat" cmpd="sng">
+            <a:solidFill>
+              <a:srgbClr val="FF0000"/>
+            </a:solidFill>
+            <a:prstDash val="solid"/>
+            <a:round/>
+            <a:headEnd type="none" w="sm" len="sm"/>
+            <a:tailEnd type="none" w="sm" len="sm"/>
+          </a:ln>
+        </p:spPr>
+        <p:txBody>
+          <a:bodyPr spcFirstLastPara="1" wrap="square" lIns="9125" tIns="9125" rIns="9125" bIns="9125" anchor="t" anchorCtr="0">
+            <a:spAutoFit/>
+          </a:bodyPr>
+          <a:lstStyle/>
+          <a:p>
+            <a:pPr marL="171450" marR="0" lvl="0" indent="-133350" algn="l" rtl="0">
+              <a:lnSpc>
+                <a:spcPct val="100000"/>
+              </a:lnSpc>
+              <a:spcBef>
+                <a:spcPts val="0"/>
+              </a:spcBef>
+              <a:spcAft>
+                <a:spcPts val="0"/>
+              </a:spcAft>
+              <a:buClr>
+                <a:schemeClr val="dk1"/>
+              </a:buClr>
+              <a:buSzPts val="1200"/>
+              <a:buFont typeface="Calibri"/>
+              <a:buChar char="●"/>
+            </a:pPr>
+            <a:r>
+              <a:rPr lang="en" sz="1200" b="1">
+                <a:solidFill>
+                  <a:srgbClr val="FF0000"/>
+                </a:solidFill>
+                <a:latin typeface="Calibri"/>
+                <a:ea typeface="Calibri"/>
+                <a:cs typeface="Calibri"/>
+                <a:sym typeface="Calibri"/>
+              </a:rPr>
+              <a:t>Google Gemini 3.1 Ultra </a:t>
+            </a:r>
+            <a:r>
+              <a:rPr lang="en" sz="1200">
+                <a:solidFill>
+                  <a:schemeClr val="dk1"/>
+                </a:solidFill>
+                <a:latin typeface="Calibri"/>
+                <a:ea typeface="Calibri"/>
+                <a:cs typeface="Calibri"/>
+                <a:sym typeface="Calibri"/>
+              </a:rPr>
+              <a:t>with n</a:t>
+            </a:r>
+            <a:r>
+              <a:rPr lang="en" sz="1200" b="1">
+                <a:solidFill>
+                  <a:srgbClr val="3C78D8"/>
+                </a:solidFill>
+                <a:latin typeface="Calibri"/>
+                <a:ea typeface="Calibri"/>
+                <a:cs typeface="Calibri"/>
+                <a:sym typeface="Calibri"/>
+              </a:rPr>
+              <a:t>ative multimodal reasoning and a 2M token context window</a:t>
+            </a:r>
+            <a:endParaRPr sz="1200" b="1">
+              <a:solidFill>
+                <a:srgbClr val="3C78D8"/>
+              </a:solidFill>
+              <a:latin typeface="Calibri"/>
+              <a:ea typeface="Calibri"/>
+              <a:cs typeface="Calibri"/>
+              <a:sym typeface="Calibri"/>
+            </a:endParaRPr>
+          </a:p>
+          <a:p>
+            <a:pPr marL="171450" marR="0" lvl="0" indent="-133350" algn="l" rtl="0">
+              <a:lnSpc>
+                <a:spcPct val="100000"/>
+              </a:lnSpc>
+              <a:spcBef>
+                <a:spcPts val="0"/>
+              </a:spcBef>
+              <a:spcAft>
+                <a:spcPts val="0"/>
+              </a:spcAft>
+              <a:buClr>
+                <a:schemeClr val="dk1"/>
+              </a:buClr>
+              <a:buSzPts val="1200"/>
+              <a:buFont typeface="Calibri"/>
+              <a:buChar char="●"/>
+            </a:pPr>
+            <a:r>
+              <a:rPr lang="en" sz="1200">
+                <a:solidFill>
+                  <a:schemeClr val="dk1"/>
+                </a:solidFill>
+                <a:latin typeface="Calibri"/>
+                <a:ea typeface="Calibri"/>
+                <a:cs typeface="Calibri"/>
+                <a:sym typeface="Calibri"/>
+              </a:rPr>
+              <a:t>Gemini hit 750 million active users</a:t>
+            </a:r>
+            <a:endParaRPr sz="1200">
+              <a:solidFill>
+                <a:schemeClr val="dk1"/>
+              </a:solidFill>
+              <a:latin typeface="Calibri"/>
+              <a:ea typeface="Calibri"/>
+              <a:cs typeface="Calibri"/>
+              <a:sym typeface="Calibri"/>
+            </a:endParaRPr>
+          </a:p>
+          <a:p>
+            <a:pPr marL="171450" marR="0" lvl="0" indent="-133350" algn="l" rtl="0">
+              <a:lnSpc>
+                <a:spcPct val="100000"/>
+              </a:lnSpc>
+              <a:spcBef>
+                <a:spcPts val="0"/>
+              </a:spcBef>
+              <a:spcAft>
+                <a:spcPts val="0"/>
+              </a:spcAft>
+              <a:buClr>
+                <a:schemeClr val="dk1"/>
+              </a:buClr>
+              <a:buSzPts val="1200"/>
+              <a:buFont typeface="Calibri"/>
+              <a:buChar char="●"/>
+            </a:pPr>
+            <a:r>
+              <a:rPr lang="en" sz="1200">
+                <a:solidFill>
+                  <a:schemeClr val="dk1"/>
+                </a:solidFill>
+                <a:latin typeface="Calibri"/>
+                <a:ea typeface="Calibri"/>
+                <a:cs typeface="Calibri"/>
+                <a:sym typeface="Calibri"/>
+              </a:rPr>
+              <a:t>Users can import chat history from ChatGPT into Gemini</a:t>
+            </a:r>
+            <a:endParaRPr sz="1200">
+              <a:solidFill>
+                <a:schemeClr val="dk1"/>
+              </a:solidFill>
+              <a:latin typeface="Calibri"/>
+              <a:ea typeface="Calibri"/>
+              <a:cs typeface="Calibri"/>
+              <a:sym typeface="Calibri"/>
+            </a:endParaRPr>
+          </a:p>
+          <a:p>
+            <a:pPr marL="171450" marR="0" lvl="0" indent="-133350" algn="l" rtl="0">
+              <a:lnSpc>
+                <a:spcPct val="100000"/>
+              </a:lnSpc>
+              <a:spcBef>
+                <a:spcPts val="0"/>
+              </a:spcBef>
+              <a:spcAft>
+                <a:spcPts val="0"/>
+              </a:spcAft>
+              <a:buClr>
+                <a:schemeClr val="dk1"/>
+              </a:buClr>
+              <a:buSzPts val="1200"/>
+              <a:buFont typeface="Calibri"/>
+              <a:buChar char="●"/>
+            </a:pPr>
+            <a:r>
+              <a:rPr lang="en" sz="1200">
+                <a:solidFill>
+                  <a:schemeClr val="dk1"/>
+                </a:solidFill>
+                <a:latin typeface="Calibri"/>
+                <a:ea typeface="Calibri"/>
+                <a:cs typeface="Calibri"/>
+                <a:sym typeface="Calibri"/>
+              </a:rPr>
+              <a:t>Google TV + Gemini (visual help, deep dives, sports briefs)</a:t>
+            </a:r>
+            <a:endParaRPr sz="1200">
+              <a:solidFill>
+                <a:schemeClr val="dk1"/>
+              </a:solidFill>
+              <a:latin typeface="Calibri"/>
+              <a:ea typeface="Calibri"/>
+              <a:cs typeface="Calibri"/>
+              <a:sym typeface="Calibri"/>
+            </a:endParaRPr>
+          </a:p>
+          <a:p>
+            <a:pPr marL="171450" marR="0" lvl="0" indent="-133350" algn="l" rtl="0">
+              <a:lnSpc>
+                <a:spcPct val="100000"/>
+              </a:lnSpc>
+              <a:spcBef>
+                <a:spcPts val="0"/>
+              </a:spcBef>
+              <a:spcAft>
+                <a:spcPts val="0"/>
+              </a:spcAft>
+              <a:buClr>
+                <a:schemeClr val="dk1"/>
+              </a:buClr>
+              <a:buSzPts val="1200"/>
+              <a:buFont typeface="Calibri"/>
+              <a:buChar char="●"/>
+            </a:pPr>
+            <a:r>
+              <a:rPr lang="en" sz="1200">
+                <a:solidFill>
+                  <a:schemeClr val="dk1"/>
+                </a:solidFill>
+                <a:latin typeface="Calibri"/>
+                <a:ea typeface="Calibri"/>
+                <a:cs typeface="Calibri"/>
+                <a:sym typeface="Calibri"/>
+              </a:rPr>
+              <a:t>Google confirmed it's exploring ads inside the Gemini interface as AI responses reduce traditional search traffic</a:t>
+            </a:r>
+            <a:endParaRPr sz="1200">
+              <a:solidFill>
+                <a:schemeClr val="dk1"/>
+              </a:solidFill>
+              <a:latin typeface="Calibri"/>
+              <a:ea typeface="Calibri"/>
+              <a:cs typeface="Calibri"/>
+              <a:sym typeface="Calibri"/>
+            </a:endParaRPr>
+          </a:p>
+        </p:txBody>
+      </p:sp>
     </p:spTree>
   </p:cSld>
   <p:clrMapOvr>
